--- a/production/slides/01-u2-ch1-renewable-nonrenewable-slides.pptx
+++ b/production/slides/01-u2-ch1-renewable-nonrenewable-slides.pptx
@@ -8,6 +8,7 @@
     <p:sldId id="256" r:id="rId7"/>
     <p:sldId id="257" r:id="rId8"/>
     <p:sldId id="258" r:id="rId9"/>
+    <p:sldId id="276" r:id="rId27"/>
     <p:sldId id="259" r:id="rId10"/>
     <p:sldId id="260" r:id="rId11"/>
     <p:sldId id="261" r:id="rId12"/>
@@ -6511,6 +6512,369 @@
                 <a:latin typeface="Arial"/>
               </a:rPr>
               <a:t>C. Abundant does NOT mean renewable.</a:t>
+            </a:r>
+          </a:p>
+        </p:txBody>
+      </p:sp>
+    </p:spTree>
+  </p:cSld>
+  <p:clrMapOvr>
+    <a:masterClrMapping/>
+  </p:clrMapOvr>
+</p:sld>
+</file>
+
+<file path=ppt/slides/slide21.xml><?xml version="1.0" encoding="utf-8"?>
+<p:sld xmlns:a="http://schemas.openxmlformats.org/drawingml/2006/main" xmlns:r="http://schemas.openxmlformats.org/officeDocument/2006/relationships" xmlns:p="http://schemas.openxmlformats.org/presentationml/2006/main">
+  <p:cSld>
+    <p:spTree>
+      <p:nvGrpSpPr>
+        <p:cNvPr id="1" name=""/>
+        <p:cNvGrpSpPr/>
+        <p:nvPr/>
+      </p:nvGrpSpPr>
+      <p:grpSpPr/>
+      <p:sp>
+        <p:nvSpPr>
+          <p:cNvPr id="2" name="Rectangle 1"/>
+          <p:cNvSpPr/>
+          <p:nvPr/>
+        </p:nvSpPr>
+        <p:spPr>
+          <a:xfrm>
+            <a:off x="0" y="0"/>
+            <a:ext cx="12191695" cy="6858000"/>
+          </a:xfrm>
+          <a:prstGeom prst="rect">
+            <a:avLst/>
+          </a:prstGeom>
+          <a:solidFill>
+            <a:srgbClr val="FAFAF8"/>
+          </a:solidFill>
+          <a:ln>
+            <a:noFill/>
+          </a:ln>
+          <a:effectLst/>
+        </p:spPr>
+        <p:style>
+          <a:lnRef idx="1">
+            <a:schemeClr val="accent1"/>
+          </a:lnRef>
+          <a:fillRef idx="3">
+            <a:schemeClr val="accent1"/>
+          </a:fillRef>
+          <a:effectRef idx="2">
+            <a:schemeClr val="accent1"/>
+          </a:effectRef>
+          <a:fontRef idx="minor">
+            <a:schemeClr val="lt1"/>
+          </a:fontRef>
+        </p:style>
+        <p:txBody>
+          <a:bodyPr rtlCol="0" anchor="ctr"/>
+          <a:lstStyle/>
+          <a:p>
+            <a:pPr algn="ctr"/>
+          </a:p>
+        </p:txBody>
+      </p:sp>
+      <p:sp>
+        <p:nvSpPr>
+          <p:cNvPr id="3" name="Rectangle 2"/>
+          <p:cNvSpPr/>
+          <p:nvPr/>
+        </p:nvSpPr>
+        <p:spPr>
+          <a:xfrm>
+            <a:off x="0" y="0"/>
+            <a:ext cx="12191695" cy="1417320"/>
+          </a:xfrm>
+          <a:prstGeom prst="rect">
+            <a:avLst/>
+          </a:prstGeom>
+          <a:solidFill>
+            <a:srgbClr val="2F3C7E"/>
+          </a:solidFill>
+          <a:ln>
+            <a:noFill/>
+          </a:ln>
+          <a:effectLst/>
+        </p:spPr>
+        <p:style>
+          <a:lnRef idx="1">
+            <a:schemeClr val="accent1"/>
+          </a:lnRef>
+          <a:fillRef idx="3">
+            <a:schemeClr val="accent1"/>
+          </a:fillRef>
+          <a:effectRef idx="2">
+            <a:schemeClr val="accent1"/>
+          </a:effectRef>
+          <a:fontRef idx="minor">
+            <a:schemeClr val="lt1"/>
+          </a:fontRef>
+        </p:style>
+        <p:txBody>
+          <a:bodyPr rtlCol="0" anchor="ctr"/>
+          <a:lstStyle/>
+          <a:p>
+            <a:pPr algn="ctr"/>
+          </a:p>
+        </p:txBody>
+      </p:sp>
+      <p:sp>
+        <p:nvSpPr>
+          <p:cNvPr id="4" name="TextBox 3"/>
+          <p:cNvSpPr txBox="1"/>
+          <p:nvPr/>
+        </p:nvSpPr>
+        <p:spPr>
+          <a:xfrm>
+            <a:off x="457200" y="109728"/>
+            <a:ext cx="10424160" cy="868680"/>
+          </a:xfrm>
+          <a:prstGeom prst="rect">
+            <a:avLst/>
+          </a:prstGeom>
+          <a:noFill/>
+        </p:spPr>
+        <p:txBody>
+          <a:bodyPr wrap="square" anchor="ctr">
+            <a:spAutoFit/>
+          </a:bodyPr>
+          <a:lstStyle/>
+          <a:p>
+            <a:pPr algn="l">
+              <a:spcAft>
+                <a:spcPts val="400"/>
+              </a:spcAft>
+            </a:pPr>
+            <a:r>
+              <a:rPr sz="3200" b="1">
+                <a:solidFill>
+                  <a:srgbClr val="FFFFFF"/>
+                </a:solidFill>
+                <a:latin typeface="Arial"/>
+              </a:rPr>
+              <a:t>Where Does Our Energy Come From?</a:t>
+            </a:r>
+          </a:p>
+        </p:txBody>
+      </p:sp>
+      <p:sp>
+        <p:nvSpPr>
+          <p:cNvPr id="5" name="TextBox 4"/>
+          <p:cNvSpPr txBox="1"/>
+          <p:nvPr/>
+        </p:nvSpPr>
+        <p:spPr>
+          <a:xfrm>
+            <a:off x="457200" y="1024128"/>
+            <a:ext cx="10424160" cy="329184"/>
+          </a:xfrm>
+          <a:prstGeom prst="rect">
+            <a:avLst/>
+          </a:prstGeom>
+          <a:noFill/>
+        </p:spPr>
+        <p:txBody>
+          <a:bodyPr wrap="square" anchor="ctr">
+            <a:spAutoFit/>
+          </a:bodyPr>
+          <a:lstStyle/>
+          <a:p>
+            <a:pPr algn="l">
+              <a:spcAft>
+                <a:spcPts val="400"/>
+              </a:spcAft>
+            </a:pPr>
+            <a:r>
+              <a:rPr sz="1500" b="0">
+                <a:solidFill>
+                  <a:srgbClr val="C9D2E8"/>
+                </a:solidFill>
+                <a:latin typeface="Arial"/>
+              </a:rPr>
+              <a:t>Media placeholder · optional video · pending generation</a:t>
+            </a:r>
+          </a:p>
+        </p:txBody>
+      </p:sp>
+      <p:sp>
+        <p:nvSpPr>
+          <p:cNvPr id="6" name="TextBox 5"/>
+          <p:cNvSpPr txBox="1"/>
+          <p:nvPr/>
+        </p:nvSpPr>
+        <p:spPr>
+          <a:xfrm>
+            <a:off x="10607040" y="310896"/>
+            <a:ext cx="731520" cy="365760"/>
+          </a:xfrm>
+          <a:prstGeom prst="rect">
+            <a:avLst/>
+          </a:prstGeom>
+          <a:noFill/>
+        </p:spPr>
+        <p:txBody>
+          <a:bodyPr wrap="square" anchor="ctr">
+            <a:spAutoFit/>
+          </a:bodyPr>
+          <a:lstStyle/>
+          <a:p>
+            <a:pPr algn="r">
+              <a:spcAft>
+                <a:spcPts val="400"/>
+              </a:spcAft>
+            </a:pPr>
+            <a:r>
+              <a:rPr sz="1500" b="0">
+                <a:solidFill>
+                  <a:srgbClr val="C9D2E8"/>
+                </a:solidFill>
+                <a:latin typeface="Arial"/>
+              </a:rPr>
+              <a:t>4</a:t>
+            </a:r>
+          </a:p>
+        </p:txBody>
+      </p:sp>
+      <p:sp>
+        <p:nvSpPr>
+          <p:cNvPr id="7" name="Rounded Rectangle 6"/>
+          <p:cNvSpPr/>
+          <p:nvPr/>
+        </p:nvSpPr>
+        <p:spPr>
+          <a:xfrm>
+            <a:off x="10972800" y="256032"/>
+            <a:ext cx="1051560" cy="420624"/>
+          </a:xfrm>
+          <a:prstGeom prst="roundRect">
+            <a:avLst/>
+          </a:prstGeom>
+          <a:solidFill>
+            <a:srgbClr val="2F3C7E"/>
+          </a:solidFill>
+          <a:ln>
+            <a:noFill/>
+          </a:ln>
+          <a:effectLst/>
+        </p:spPr>
+        <p:style>
+          <a:lnRef idx="1">
+            <a:schemeClr val="accent1"/>
+          </a:lnRef>
+          <a:fillRef idx="3">
+            <a:schemeClr val="accent1"/>
+          </a:fillRef>
+          <a:effectRef idx="2">
+            <a:schemeClr val="accent1"/>
+          </a:effectRef>
+          <a:fontRef idx="minor">
+            <a:schemeClr val="lt1"/>
+          </a:fontRef>
+        </p:style>
+        <p:txBody>
+          <a:bodyPr rtlCol="0" anchor="ctr" wrap="none"/>
+          <a:lstStyle/>
+          <a:p>
+            <a:pPr algn="ctr"/>
+            <a:r>
+              <a:rPr sz="1100" b="1">
+                <a:solidFill>
+                  <a:srgbClr val="FFFFFF"/>
+                </a:solidFill>
+                <a:latin typeface="Arial"/>
+              </a:rPr>
+              <a:t>PLACEHOLDER</a:t>
+            </a:r>
+          </a:p>
+        </p:txBody>
+      </p:sp>
+      <p:sp>
+        <p:nvSpPr>
+          <p:cNvPr id="8" name="TextBox 7"/>
+          <p:cNvSpPr txBox="1"/>
+          <p:nvPr/>
+        </p:nvSpPr>
+        <p:spPr>
+          <a:xfrm>
+            <a:off x="822960" y="1700000"/>
+            <a:ext cx="10515600" cy="4400000"/>
+          </a:xfrm>
+          <a:prstGeom prst="rect">
+            <a:avLst/>
+          </a:prstGeom>
+          <a:noFill/>
+        </p:spPr>
+        <p:txBody>
+          <a:bodyPr wrap="square">
+            <a:spAutoFit/>
+          </a:bodyPr>
+          <a:lstStyle/>
+          <a:p>
+            <a:pPr>
+              <a:spcAft>
+                <a:spcPts val="1000"/>
+              </a:spcAft>
+            </a:pPr>
+            <a:r>
+              <a:rPr sz="2000" b="1">
+                <a:solidFill>
+                  <a:srgbClr val="1F1F1F"/>
+                </a:solidFill>
+                <a:latin typeface="Arial"/>
+              </a:rPr>
+              <a:t>Intended: ~90-second Unit 2 launch video (Week 5 Monday).</a:t>
+            </a:r>
+          </a:p>
+          <a:p>
+            <a:pPr>
+              <a:spcAft>
+                <a:spcPts val="1000"/>
+              </a:spcAft>
+            </a:pPr>
+            <a:r>
+              <a:rPr sz="2000" b="0">
+                <a:solidFill>
+                  <a:srgbClr val="1F1F1F"/>
+                </a:solidFill>
+                <a:latin typeface="Arial"/>
+              </a:rPr>
+              <a:t>Script ready: production/media/scripts/unit-02/01-where-does-our-energy-come-from-final-script.md</a:t>
+            </a:r>
+          </a:p>
+          <a:p>
+            <a:pPr>
+              <a:spcAft>
+                <a:spcPts val="1000"/>
+              </a:spcAft>
+            </a:pPr>
+            <a:r>
+              <a:rPr sz="2000" b="0">
+                <a:solidFill>
+                  <a:srgbClr val="1F1F1F"/>
+                </a:solidFill>
+                <a:latin typeface="Arial"/>
+              </a:rPr>
+              <a:t>Covers: natural resources → renewable vs nonrenewable → benefits/limitations.</a:t>
+            </a:r>
+          </a:p>
+          <a:p>
+            <a:pPr>
+              <a:spcAft>
+                <a:spcPts val="1000"/>
+              </a:spcAft>
+            </a:pPr>
+            <a:r>
+              <a:rPr sz="2000" b="0">
+                <a:solidFill>
+                  <a:srgbClr val="1F1F1F"/>
+                </a:solidFill>
+                <a:latin typeface="Arial"/>
+              </a:rPr>
+              <a:t>This slide is a drop-in slot — the deck teaches fully without the video.</a:t>
             </a:r>
           </a:p>
         </p:txBody>

--- a/production/slides/01-u2-ch1-renewable-nonrenewable-slides.pptx
+++ b/production/slides/01-u2-ch1-renewable-nonrenewable-slides.pptx
@@ -26,6 +26,7 @@
     <p:sldId id="273" r:id="rId24"/>
     <p:sldId id="274" r:id="rId25"/>
     <p:sldId id="275" r:id="rId26"/>
+    <p:sldId id="277" r:id="rId28"/>
   </p:sldIdLst>
   <p:sldSz cx="12191695" cy="6858000" type="screen4x3"/>
   <p:notesSz cx="6858000" cy="9144000"/>
@@ -125,6 +126,442 @@
     </a:lvl9pPr>
   </p:defaultTextStyle>
 </p:presentation>
+</file>
+
+<file path=ppt/notesMasters/notesMaster1.xml><?xml version="1.0" encoding="utf-8"?>
+<p:notesMaster xmlns:a="http://schemas.openxmlformats.org/drawingml/2006/main" xmlns:p="http://schemas.openxmlformats.org/presentationml/2006/main" xmlns:r="http://schemas.openxmlformats.org/officeDocument/2006/relationships">
+  <p:cSld>
+    <p:bg>
+      <p:bgRef idx="1001">
+        <a:schemeClr val="bg1"/>
+      </p:bgRef>
+    </p:bg>
+    <p:spTree>
+      <p:nvGrpSpPr>
+        <p:cNvPr id="1" name=""/>
+        <p:cNvGrpSpPr/>
+        <p:nvPr/>
+      </p:nvGrpSpPr>
+      <p:grpSpPr>
+        <a:xfrm>
+          <a:off x="0" y="0"/>
+          <a:ext cx="0" cy="0"/>
+          <a:chOff x="0" y="0"/>
+          <a:chExt cx="0" cy="0"/>
+        </a:xfrm>
+      </p:grpSpPr>
+      <p:sp>
+        <p:nvSpPr>
+          <p:cNvPr id="2" name="Header Placeholder 1"/>
+          <p:cNvSpPr>
+            <a:spLocks noGrp="1"/>
+          </p:cNvSpPr>
+          <p:nvPr>
+            <p:ph type="hdr" sz="quarter"/>
+          </p:nvPr>
+        </p:nvSpPr>
+        <p:spPr>
+          <a:xfrm>
+            <a:off x="0" y="0"/>
+            <a:ext cx="2971800" cy="457200"/>
+          </a:xfrm>
+          <a:prstGeom prst="rect">
+            <a:avLst/>
+          </a:prstGeom>
+        </p:spPr>
+        <p:txBody>
+          <a:bodyPr vert="horz" lIns="91440" tIns="45720" rIns="91440" bIns="45720" rtlCol="0"/>
+          <a:lstStyle>
+            <a:lvl1pPr algn="l">
+              <a:defRPr sz="1200"/>
+            </a:lvl1pPr>
+          </a:lstStyle>
+          <a:p>
+            <a:endParaRPr lang="en-US"/>
+          </a:p>
+        </p:txBody>
+      </p:sp>
+      <p:sp>
+        <p:nvSpPr>
+          <p:cNvPr id="3" name="Date Placeholder 2"/>
+          <p:cNvSpPr>
+            <a:spLocks noGrp="1"/>
+          </p:cNvSpPr>
+          <p:nvPr>
+            <p:ph type="dt" idx="1"/>
+          </p:nvPr>
+        </p:nvSpPr>
+        <p:spPr>
+          <a:xfrm>
+            <a:off x="3884613" y="0"/>
+            <a:ext cx="2971800" cy="457200"/>
+          </a:xfrm>
+          <a:prstGeom prst="rect">
+            <a:avLst/>
+          </a:prstGeom>
+        </p:spPr>
+        <p:txBody>
+          <a:bodyPr vert="horz" lIns="91440" tIns="45720" rIns="91440" bIns="45720" rtlCol="0"/>
+          <a:lstStyle>
+            <a:lvl1pPr algn="r">
+              <a:defRPr sz="1200"/>
+            </a:lvl1pPr>
+          </a:lstStyle>
+          <a:p>
+            <a:fld id="{0F89C1C7-3DCD-1040-A9CF-14679D8B5DDD}" type="datetimeFigureOut">
+              <a:rPr lang="en-US" smtClean="0"/>
+              <a:t>10/17/16</a:t>
+            </a:fld>
+            <a:endParaRPr lang="en-US"/>
+          </a:p>
+        </p:txBody>
+      </p:sp>
+      <p:sp>
+        <p:nvSpPr>
+          <p:cNvPr id="4" name="Slide Image Placeholder 3"/>
+          <p:cNvSpPr>
+            <a:spLocks noGrp="1" noRot="1" noChangeAspect="1"/>
+          </p:cNvSpPr>
+          <p:nvPr>
+            <p:ph type="sldImg" idx="2"/>
+          </p:nvPr>
+        </p:nvSpPr>
+        <p:spPr>
+          <a:xfrm>
+            <a:off x="1143000" y="685800"/>
+            <a:ext cx="4572000" cy="3429000"/>
+          </a:xfrm>
+          <a:prstGeom prst="rect">
+            <a:avLst/>
+          </a:prstGeom>
+          <a:noFill/>
+          <a:ln w="12700">
+            <a:solidFill>
+              <a:prstClr val="black"/>
+            </a:solidFill>
+          </a:ln>
+        </p:spPr>
+        <p:txBody>
+          <a:bodyPr vert="horz" lIns="91440" tIns="45720" rIns="91440" bIns="45720" rtlCol="0" anchor="ctr"/>
+          <a:lstStyle/>
+          <a:p>
+            <a:endParaRPr lang="en-US"/>
+          </a:p>
+        </p:txBody>
+      </p:sp>
+      <p:sp>
+        <p:nvSpPr>
+          <p:cNvPr id="5" name="Notes Placeholder 4"/>
+          <p:cNvSpPr>
+            <a:spLocks noGrp="1"/>
+          </p:cNvSpPr>
+          <p:nvPr>
+            <p:ph type="body" sz="quarter" idx="3"/>
+          </p:nvPr>
+        </p:nvSpPr>
+        <p:spPr>
+          <a:xfrm>
+            <a:off x="685800" y="4343400"/>
+            <a:ext cx="5486400" cy="4114800"/>
+          </a:xfrm>
+          <a:prstGeom prst="rect">
+            <a:avLst/>
+          </a:prstGeom>
+        </p:spPr>
+        <p:txBody>
+          <a:bodyPr vert="horz" lIns="91440" tIns="45720" rIns="91440" bIns="45720" rtlCol="0"/>
+          <a:lstStyle/>
+          <a:p>
+            <a:pPr lvl="0"/>
+            <a:r>
+              <a:rPr lang="en-US" smtClean="0"/>
+              <a:t>Click to edit Master text styles</a:t>
+            </a:r>
+          </a:p>
+          <a:p>
+            <a:pPr lvl="1"/>
+            <a:r>
+              <a:rPr lang="en-US" smtClean="0"/>
+              <a:t>Second level</a:t>
+            </a:r>
+          </a:p>
+          <a:p>
+            <a:pPr lvl="2"/>
+            <a:r>
+              <a:rPr lang="en-US" smtClean="0"/>
+              <a:t>Third level</a:t>
+            </a:r>
+          </a:p>
+          <a:p>
+            <a:pPr lvl="3"/>
+            <a:r>
+              <a:rPr lang="en-US" smtClean="0"/>
+              <a:t>Fourth level</a:t>
+            </a:r>
+          </a:p>
+          <a:p>
+            <a:pPr lvl="4"/>
+            <a:r>
+              <a:rPr lang="en-US" smtClean="0"/>
+              <a:t>Fifth level</a:t>
+            </a:r>
+            <a:endParaRPr lang="en-US"/>
+          </a:p>
+        </p:txBody>
+      </p:sp>
+      <p:sp>
+        <p:nvSpPr>
+          <p:cNvPr id="6" name="Footer Placeholder 5"/>
+          <p:cNvSpPr>
+            <a:spLocks noGrp="1"/>
+          </p:cNvSpPr>
+          <p:nvPr>
+            <p:ph type="ftr" sz="quarter" idx="4"/>
+          </p:nvPr>
+        </p:nvSpPr>
+        <p:spPr>
+          <a:xfrm>
+            <a:off x="0" y="8685213"/>
+            <a:ext cx="2971800" cy="457200"/>
+          </a:xfrm>
+          <a:prstGeom prst="rect">
+            <a:avLst/>
+          </a:prstGeom>
+        </p:spPr>
+        <p:txBody>
+          <a:bodyPr vert="horz" lIns="91440" tIns="45720" rIns="91440" bIns="45720" rtlCol="0" anchor="b"/>
+          <a:lstStyle>
+            <a:lvl1pPr algn="l">
+              <a:defRPr sz="1200"/>
+            </a:lvl1pPr>
+          </a:lstStyle>
+          <a:p>
+            <a:endParaRPr lang="en-US"/>
+          </a:p>
+        </p:txBody>
+      </p:sp>
+      <p:sp>
+        <p:nvSpPr>
+          <p:cNvPr id="7" name="Slide Number Placeholder 6"/>
+          <p:cNvSpPr>
+            <a:spLocks noGrp="1"/>
+          </p:cNvSpPr>
+          <p:nvPr>
+            <p:ph type="sldNum" sz="quarter" idx="5"/>
+          </p:nvPr>
+        </p:nvSpPr>
+        <p:spPr>
+          <a:xfrm>
+            <a:off x="3884613" y="8685213"/>
+            <a:ext cx="2971800" cy="457200"/>
+          </a:xfrm>
+          <a:prstGeom prst="rect">
+            <a:avLst/>
+          </a:prstGeom>
+        </p:spPr>
+        <p:txBody>
+          <a:bodyPr vert="horz" lIns="91440" tIns="45720" rIns="91440" bIns="45720" rtlCol="0" anchor="b"/>
+          <a:lstStyle>
+            <a:lvl1pPr algn="r">
+              <a:defRPr sz="1200"/>
+            </a:lvl1pPr>
+          </a:lstStyle>
+          <a:p>
+            <a:fld id="{BB5E49A5-4136-284D-997B-48E1D791AD67}" type="slidenum">
+              <a:rPr lang="en-US" smtClean="0"/>
+              <a:t>‹#›</a:t>
+            </a:fld>
+            <a:endParaRPr lang="en-US"/>
+          </a:p>
+        </p:txBody>
+      </p:sp>
+    </p:spTree>
+    <p:extLst>
+      <p:ext uri="{BB962C8B-B14F-4D97-AF65-F5344CB8AC3E}">
+        <p14:creationId xmlns:p14="http://schemas.microsoft.com/office/powerpoint/2010/main" val="2623252185"/>
+      </p:ext>
+    </p:extLst>
+  </p:cSld>
+  <p:clrMap bg1="lt1" tx1="dk1" bg2="lt2" tx2="dk2" accent1="accent1" accent2="accent2" accent3="accent3" accent4="accent4" accent5="accent5" accent6="accent6" hlink="hlink" folHlink="folHlink"/>
+  <p:notesStyle>
+    <a:lvl1pPr marL="0" algn="l" defTabSz="457200" rtl="0" eaLnBrk="1" latinLnBrk="0" hangingPunct="1">
+      <a:defRPr sz="1200" kern="1200">
+        <a:solidFill>
+          <a:schemeClr val="tx1"/>
+        </a:solidFill>
+        <a:latin typeface="+mn-lt"/>
+        <a:ea typeface="+mn-ea"/>
+        <a:cs typeface="+mn-cs"/>
+      </a:defRPr>
+    </a:lvl1pPr>
+    <a:lvl2pPr marL="457200" algn="l" defTabSz="457200" rtl="0" eaLnBrk="1" latinLnBrk="0" hangingPunct="1">
+      <a:defRPr sz="1200" kern="1200">
+        <a:solidFill>
+          <a:schemeClr val="tx1"/>
+        </a:solidFill>
+        <a:latin typeface="+mn-lt"/>
+        <a:ea typeface="+mn-ea"/>
+        <a:cs typeface="+mn-cs"/>
+      </a:defRPr>
+    </a:lvl2pPr>
+    <a:lvl3pPr marL="914400" algn="l" defTabSz="457200" rtl="0" eaLnBrk="1" latinLnBrk="0" hangingPunct="1">
+      <a:defRPr sz="1200" kern="1200">
+        <a:solidFill>
+          <a:schemeClr val="tx1"/>
+        </a:solidFill>
+        <a:latin typeface="+mn-lt"/>
+        <a:ea typeface="+mn-ea"/>
+        <a:cs typeface="+mn-cs"/>
+      </a:defRPr>
+    </a:lvl3pPr>
+    <a:lvl4pPr marL="1371600" algn="l" defTabSz="457200" rtl="0" eaLnBrk="1" latinLnBrk="0" hangingPunct="1">
+      <a:defRPr sz="1200" kern="1200">
+        <a:solidFill>
+          <a:schemeClr val="tx1"/>
+        </a:solidFill>
+        <a:latin typeface="+mn-lt"/>
+        <a:ea typeface="+mn-ea"/>
+        <a:cs typeface="+mn-cs"/>
+      </a:defRPr>
+    </a:lvl4pPr>
+    <a:lvl5pPr marL="1828800" algn="l" defTabSz="457200" rtl="0" eaLnBrk="1" latinLnBrk="0" hangingPunct="1">
+      <a:defRPr sz="1200" kern="1200">
+        <a:solidFill>
+          <a:schemeClr val="tx1"/>
+        </a:solidFill>
+        <a:latin typeface="+mn-lt"/>
+        <a:ea typeface="+mn-ea"/>
+        <a:cs typeface="+mn-cs"/>
+      </a:defRPr>
+    </a:lvl5pPr>
+    <a:lvl6pPr marL="2286000" algn="l" defTabSz="457200" rtl="0" eaLnBrk="1" latinLnBrk="0" hangingPunct="1">
+      <a:defRPr sz="1200" kern="1200">
+        <a:solidFill>
+          <a:schemeClr val="tx1"/>
+        </a:solidFill>
+        <a:latin typeface="+mn-lt"/>
+        <a:ea typeface="+mn-ea"/>
+        <a:cs typeface="+mn-cs"/>
+      </a:defRPr>
+    </a:lvl6pPr>
+    <a:lvl7pPr marL="2743200" algn="l" defTabSz="457200" rtl="0" eaLnBrk="1" latinLnBrk="0" hangingPunct="1">
+      <a:defRPr sz="1200" kern="1200">
+        <a:solidFill>
+          <a:schemeClr val="tx1"/>
+        </a:solidFill>
+        <a:latin typeface="+mn-lt"/>
+        <a:ea typeface="+mn-ea"/>
+        <a:cs typeface="+mn-cs"/>
+      </a:defRPr>
+    </a:lvl7pPr>
+    <a:lvl8pPr marL="3200400" algn="l" defTabSz="457200" rtl="0" eaLnBrk="1" latinLnBrk="0" hangingPunct="1">
+      <a:defRPr sz="1200" kern="1200">
+        <a:solidFill>
+          <a:schemeClr val="tx1"/>
+        </a:solidFill>
+        <a:latin typeface="+mn-lt"/>
+        <a:ea typeface="+mn-ea"/>
+        <a:cs typeface="+mn-cs"/>
+      </a:defRPr>
+    </a:lvl8pPr>
+    <a:lvl9pPr marL="3657600" algn="l" defTabSz="457200" rtl="0" eaLnBrk="1" latinLnBrk="0" hangingPunct="1">
+      <a:defRPr sz="1200" kern="1200">
+        <a:solidFill>
+          <a:schemeClr val="tx1"/>
+        </a:solidFill>
+        <a:latin typeface="+mn-lt"/>
+        <a:ea typeface="+mn-ea"/>
+        <a:cs typeface="+mn-cs"/>
+      </a:defRPr>
+    </a:lvl9pPr>
+  </p:notesStyle>
+</p:notesMaster>
+</file>
+
+<file path=ppt/notesSlides/notesSlide1.xml><?xml version="1.0" encoding="utf-8"?>
+<p:notes xmlns:a="http://schemas.openxmlformats.org/drawingml/2006/main" xmlns:p="http://schemas.openxmlformats.org/presentationml/2006/main" xmlns:r="http://schemas.openxmlformats.org/officeDocument/2006/relationships">
+  <p:cSld>
+    <p:spTree>
+      <p:nvGrpSpPr>
+        <p:cNvPr id="1" name=""/>
+        <p:cNvGrpSpPr/>
+        <p:nvPr/>
+      </p:nvGrpSpPr>
+      <p:grpSpPr>
+        <a:xfrm>
+          <a:off x="0" y="0"/>
+          <a:ext cx="0" cy="0"/>
+          <a:chOff x="0" y="0"/>
+          <a:chExt cx="0" cy="0"/>
+        </a:xfrm>
+      </p:grpSpPr>
+      <p:sp>
+        <p:nvSpPr>
+          <p:cNvPr id="2" name="Slide Image Placeholder 1"/>
+          <p:cNvSpPr>
+            <a:spLocks noGrp="1"/>
+          </p:cNvSpPr>
+          <p:nvPr>
+            <p:ph type="sldImg" idx="2"/>
+          </p:nvPr>
+        </p:nvSpPr>
+        <p:spPr/>
+      </p:sp>
+      <p:sp>
+        <p:nvSpPr>
+          <p:cNvPr id="3" name="Notes Placeholder 2"/>
+          <p:cNvSpPr>
+            <a:spLocks noGrp="1"/>
+          </p:cNvSpPr>
+          <p:nvPr>
+            <p:ph type="body" idx="3" sz="quarter"/>
+          </p:nvPr>
+        </p:nvSpPr>
+        <p:spPr/>
+        <p:txBody>
+          <a:bodyPr/>
+          <a:lstStyle/>
+          <a:p>
+            <a:r>
+              <a:t>INFOGRAPHIC REFERENCE (COMPARE)</a:t>
+            </a:r>
+          </a:p>
+          <a:p>
+            <a:r>
+              <a:t>Which resources renew quickly enough to be called renewable?</a:t>
+            </a:r>
+          </a:p>
+          <a:p/>
+          <a:p>
+            <a:r>
+              <a:t>U2 Ch1 renewable vs nonrenewable matrix.</a:t>
+            </a:r>
+          </a:p>
+          <a:p>
+            <a:r>
+              <a:t>Approved rebuilt visual — production/infographics/unit2-renewable-nonrenewable-resources.png. Locked Grade 4 vocabulary only.</a:t>
+            </a:r>
+          </a:p>
+        </p:txBody>
+      </p:sp>
+      <p:sp>
+        <p:nvSpPr>
+          <p:cNvPr id="4" name="Slide Number Placeholder 3"/>
+          <p:cNvSpPr>
+            <a:spLocks noGrp="1"/>
+          </p:cNvSpPr>
+          <p:nvPr>
+            <p:ph type="sldNum" idx="5" sz="quarter"/>
+          </p:nvPr>
+        </p:nvSpPr>
+        <p:spPr/>
+      </p:sp>
+    </p:spTree>
+  </p:cSld>
+  <p:clrMapOvr>
+    <a:masterClrMapping/>
+  </p:clrMapOvr>
+</p:notes>
 </file>
 
 <file path=ppt/slideLayouts/slideLayout1.xml><?xml version="1.0" encoding="utf-8"?>
@@ -3453,7 +3890,7 @@
                 </a:solidFill>
                 <a:latin typeface="Arial"/>
               </a:rPr>
-              <a:t>Draw / Label</a:t>
+              <a:t>Model It: restored quickly</a:t>
             </a:r>
           </a:p>
         </p:txBody>
@@ -3492,7 +3929,7 @@
                 </a:solidFill>
                 <a:latin typeface="Arial"/>
               </a:rPr>
-              <a:t>Page 3 · Draw/Label</a:t>
+              <a:t>Page 2 · Model It</a:t>
             </a:r>
           </a:p>
         </p:txBody>
@@ -3531,7 +3968,7 @@
                 </a:solidFill>
                 <a:latin typeface="Arial"/>
               </a:rPr>
-              <a:t>10</a:t>
+              <a:t>9</a:t>
             </a:r>
           </a:p>
         </p:txBody>
@@ -3551,7 +3988,7 @@
             <a:avLst/>
           </a:prstGeom>
           <a:solidFill>
-            <a:srgbClr val="3E7A4E"/>
+            <a:srgbClr val="2F3C7E"/>
           </a:solidFill>
           <a:ln>
             <a:noFill/>
@@ -3584,7 +4021,7 @@
                 </a:solidFill>
                 <a:latin typeface="Arial"/>
               </a:rPr>
-              <a:t>DRAW</a:t>
+              <a:t>NOTE</a:t>
             </a:r>
           </a:p>
         </p:txBody>
@@ -3597,7 +4034,46 @@
         </p:nvSpPr>
         <p:spPr>
           <a:xfrm>
-            <a:off x="822960" y="1645920"/>
+            <a:off x="457200" y="1517904"/>
+            <a:ext cx="10789920" cy="365760"/>
+          </a:xfrm>
+          <a:prstGeom prst="rect">
+            <a:avLst/>
+          </a:prstGeom>
+          <a:noFill/>
+        </p:spPr>
+        <p:txBody>
+          <a:bodyPr wrap="square" anchor="t">
+            <a:spAutoFit/>
+          </a:bodyPr>
+          <a:lstStyle/>
+          <a:p>
+            <a:pPr algn="l">
+              <a:spcAft>
+                <a:spcPts val="400"/>
+              </a:spcAft>
+            </a:pPr>
+            <a:r>
+              <a:rPr sz="1400" b="0" i="1">
+                <a:solidFill>
+                  <a:srgbClr val="C03D3D"/>
+                </a:solidFill>
+                <a:latin typeface="Arial"/>
+              </a:rPr>
+              <a:t>Reveal after students try.</a:t>
+            </a:r>
+          </a:p>
+        </p:txBody>
+      </p:sp>
+      <p:sp>
+        <p:nvSpPr>
+          <p:cNvPr id="9" name="TextBox 8"/>
+          <p:cNvSpPr txBox="1"/>
+          <p:nvPr/>
+        </p:nvSpPr>
+        <p:spPr>
+          <a:xfrm>
+            <a:off x="822960" y="2011680"/>
             <a:ext cx="10515600" cy="3017520"/>
           </a:xfrm>
           <a:prstGeom prst="rect">
@@ -3623,7 +4099,96 @@
                 </a:solidFill>
                 <a:latin typeface="Arial"/>
               </a:rPr>
-              <a:t>Draw one renewable and one nonrenewable resource.</a:t>
+              <a:t>Copy the chain.</a:t>
+            </a:r>
+          </a:p>
+        </p:txBody>
+      </p:sp>
+      <p:sp>
+        <p:nvSpPr>
+          <p:cNvPr id="10" name="Rounded Rectangle 9"/>
+          <p:cNvSpPr/>
+          <p:nvPr/>
+        </p:nvSpPr>
+        <p:spPr>
+          <a:xfrm>
+            <a:off x="822960" y="5120640"/>
+            <a:ext cx="10515600" cy="868680"/>
+          </a:xfrm>
+          <a:prstGeom prst="roundRect">
+            <a:avLst/>
+          </a:prstGeom>
+          <a:solidFill>
+            <a:srgbClr val="2F3C7E"/>
+          </a:solidFill>
+          <a:ln>
+            <a:noFill/>
+          </a:ln>
+          <a:effectLst/>
+        </p:spPr>
+        <p:style>
+          <a:lnRef idx="1">
+            <a:schemeClr val="accent1"/>
+          </a:lnRef>
+          <a:fillRef idx="3">
+            <a:schemeClr val="accent1"/>
+          </a:fillRef>
+          <a:effectRef idx="2">
+            <a:schemeClr val="accent1"/>
+          </a:effectRef>
+          <a:fontRef idx="minor">
+            <a:schemeClr val="lt1"/>
+          </a:fontRef>
+        </p:style>
+        <p:txBody>
+          <a:bodyPr rtlCol="0" anchor="ctr" wrap="square" lIns="127000" rIns="127000"/>
+          <a:lstStyle/>
+          <a:p>
+            <a:pPr algn="ctr"/>
+            <a:r>
+              <a:rPr sz="2600" b="1">
+                <a:solidFill>
+                  <a:srgbClr val="E8C54A"/>
+                </a:solidFill>
+                <a:latin typeface="Arial"/>
+              </a:rPr>
+              <a:t>USED SLOWLY</a:t>
+            </a:r>
+            <a:r>
+              <a:rPr sz="2600" b="1">
+                <a:solidFill>
+                  <a:srgbClr val="C03D3D"/>
+                </a:solidFill>
+                <a:latin typeface="Arial"/>
+              </a:rPr>
+              <a:t> → </a:t>
+            </a:r>
+            <a:r>
+              <a:rPr sz="2600" b="1">
+                <a:solidFill>
+                  <a:srgbClr val="FFFFFF"/>
+                </a:solidFill>
+                <a:latin typeface="Arial"/>
+              </a:rPr>
+              <a:t>RESTORED QUICKLY</a:t>
+            </a:r>
+            <a:r>
+              <a:rPr sz="2600" b="1">
+                <a:solidFill>
+                  <a:srgbClr val="C03D3D"/>
+                </a:solidFill>
+                <a:latin typeface="Arial"/>
+              </a:rPr>
+              <a:t> → </a:t>
+            </a:r>
+            <a:r>
+              <a:rPr sz="2600" b="1">
+                <a:solidFill>
+                  <a:srgbClr val="FFFFFF"/>
+                </a:solidFill>
+                <a:latin typeface="Arial"/>
+              </a:rPr>
+              <a:t>RENEWABLE</a:t>
             </a:r>
           </a:p>
         </p:txBody>
@@ -3699,7 +4264,7 @@
         <p:spPr>
           <a:xfrm>
             <a:off x="0" y="0"/>
-            <a:ext cx="12191695" cy="822960"/>
+            <a:ext cx="12191695" cy="1417320"/>
           </a:xfrm>
           <a:prstGeom prst="rect">
             <a:avLst/>
@@ -3742,8 +4307,8 @@
         </p:nvSpPr>
         <p:spPr>
           <a:xfrm>
-            <a:off x="457200" y="146304"/>
-            <a:ext cx="10515600" cy="548640"/>
+            <a:off x="457200" y="109728"/>
+            <a:ext cx="10424160" cy="868680"/>
           </a:xfrm>
           <a:prstGeom prst="rect">
             <a:avLst/>
@@ -3762,13 +4327,13 @@
               </a:spcAft>
             </a:pPr>
             <a:r>
-              <a:rPr sz="2400" b="1" i="0">
+              <a:rPr sz="3800" b="1" i="0">
                 <a:solidFill>
                   <a:srgbClr val="FFFFFF"/>
                 </a:solidFill>
                 <a:latin typeface="Arial"/>
               </a:rPr>
-              <a:t>Review</a:t>
+              <a:t>Draw / Label</a:t>
             </a:r>
           </a:p>
         </p:txBody>
@@ -3781,7 +4346,46 @@
         </p:nvSpPr>
         <p:spPr>
           <a:xfrm>
-            <a:off x="10424160" y="256032"/>
+            <a:off x="457200" y="1024128"/>
+            <a:ext cx="10424160" cy="329184"/>
+          </a:xfrm>
+          <a:prstGeom prst="rect">
+            <a:avLst/>
+          </a:prstGeom>
+          <a:noFill/>
+        </p:spPr>
+        <p:txBody>
+          <a:bodyPr wrap="square" anchor="t">
+            <a:spAutoFit/>
+          </a:bodyPr>
+          <a:lstStyle/>
+          <a:p>
+            <a:pPr algn="l">
+              <a:spcAft>
+                <a:spcPts val="400"/>
+              </a:spcAft>
+            </a:pPr>
+            <a:r>
+              <a:rPr sz="1500" b="0" i="0">
+                <a:solidFill>
+                  <a:srgbClr val="C9D2E8"/>
+                </a:solidFill>
+                <a:latin typeface="Arial"/>
+              </a:rPr>
+              <a:t>Page 3 · Draw/Label</a:t>
+            </a:r>
+          </a:p>
+        </p:txBody>
+      </p:sp>
+      <p:sp>
+        <p:nvSpPr>
+          <p:cNvPr id="6" name="TextBox 5"/>
+          <p:cNvSpPr txBox="1"/>
+          <p:nvPr/>
+        </p:nvSpPr>
+        <p:spPr>
+          <a:xfrm>
+            <a:off x="10607040" y="310896"/>
             <a:ext cx="731520" cy="365760"/>
           </a:xfrm>
           <a:prstGeom prst="rect">
@@ -3801,27 +4405,80 @@
               </a:spcAft>
             </a:pPr>
             <a:r>
-              <a:rPr sz="1400" b="0" i="0">
+              <a:rPr sz="1500" b="0" i="0">
                 <a:solidFill>
                   <a:srgbClr val="C9D2E8"/>
                 </a:solidFill>
                 <a:latin typeface="Arial"/>
               </a:rPr>
-              <a:t>11</a:t>
-            </a:r>
-          </a:p>
-        </p:txBody>
-      </p:sp>
-      <p:sp>
-        <p:nvSpPr>
-          <p:cNvPr id="6" name="TextBox 5"/>
+              <a:t>10</a:t>
+            </a:r>
+          </a:p>
+        </p:txBody>
+      </p:sp>
+      <p:sp>
+        <p:nvSpPr>
+          <p:cNvPr id="7" name="Rounded Rectangle 6"/>
+          <p:cNvSpPr/>
+          <p:nvPr/>
+        </p:nvSpPr>
+        <p:spPr>
+          <a:xfrm>
+            <a:off x="10972800" y="256032"/>
+            <a:ext cx="1051560" cy="420624"/>
+          </a:xfrm>
+          <a:prstGeom prst="roundRect">
+            <a:avLst/>
+          </a:prstGeom>
+          <a:solidFill>
+            <a:srgbClr val="3E7A4E"/>
+          </a:solidFill>
+          <a:ln>
+            <a:noFill/>
+          </a:ln>
+          <a:effectLst/>
+        </p:spPr>
+        <p:style>
+          <a:lnRef idx="1">
+            <a:schemeClr val="accent1"/>
+          </a:lnRef>
+          <a:fillRef idx="3">
+            <a:schemeClr val="accent1"/>
+          </a:fillRef>
+          <a:effectRef idx="2">
+            <a:schemeClr val="accent1"/>
+          </a:effectRef>
+          <a:fontRef idx="minor">
+            <a:schemeClr val="lt1"/>
+          </a:fontRef>
+        </p:style>
+        <p:txBody>
+          <a:bodyPr rtlCol="0" anchor="ctr" wrap="none"/>
+          <a:lstStyle/>
+          <a:p>
+            <a:pPr algn="ctr"/>
+            <a:r>
+              <a:rPr sz="1100" b="1">
+                <a:solidFill>
+                  <a:srgbClr val="FFFFFF"/>
+                </a:solidFill>
+                <a:latin typeface="Arial"/>
+              </a:rPr>
+              <a:t>DRAW</a:t>
+            </a:r>
+          </a:p>
+        </p:txBody>
+      </p:sp>
+      <p:sp>
+        <p:nvSpPr>
+          <p:cNvPr id="8" name="TextBox 7"/>
           <p:cNvSpPr txBox="1"/>
           <p:nvPr/>
         </p:nvSpPr>
         <p:spPr>
           <a:xfrm>
-            <a:off x="822960" y="1463040"/>
-            <a:ext cx="10515600" cy="1188720"/>
+            <a:off x="822960" y="1645920"/>
+            <a:ext cx="10515600" cy="3017520"/>
           </a:xfrm>
           <a:prstGeom prst="rect">
             <a:avLst/>
@@ -3829,111 +4486,24 @@
           <a:noFill/>
         </p:spPr>
         <p:txBody>
-          <a:bodyPr wrap="square" anchor="t">
+          <a:bodyPr wrap="square">
             <a:spAutoFit/>
           </a:bodyPr>
           <a:lstStyle/>
           <a:p>
-            <a:pPr algn="l">
+            <a:pPr>
               <a:spcAft>
-                <a:spcPts val="400"/>
+                <a:spcPts val="1000"/>
               </a:spcAft>
             </a:pPr>
             <a:r>
-              <a:rPr sz="3000" b="1" i="0">
+              <a:rPr sz="3200">
                 <a:solidFill>
                   <a:srgbClr val="1F1F1F"/>
                 </a:solidFill>
                 <a:latin typeface="Arial"/>
               </a:rPr>
-              <a:t>Coal is plentiful now but forms over millions of years. Coal is —</a:t>
-            </a:r>
-          </a:p>
-        </p:txBody>
-      </p:sp>
-      <p:sp>
-        <p:nvSpPr>
-          <p:cNvPr id="7" name="TextBox 6"/>
-          <p:cNvSpPr txBox="1"/>
-          <p:nvPr/>
-        </p:nvSpPr>
-        <p:spPr>
-          <a:xfrm>
-            <a:off x="822960" y="2834640"/>
-            <a:ext cx="10515600" cy="3108960"/>
-          </a:xfrm>
-          <a:prstGeom prst="rect">
-            <a:avLst/>
-          </a:prstGeom>
-          <a:noFill/>
-        </p:spPr>
-        <p:txBody>
-          <a:bodyPr wrap="square" anchor="t">
-            <a:spAutoFit/>
-          </a:bodyPr>
-          <a:lstStyle/>
-          <a:p>
-            <a:pPr algn="l">
-              <a:spcAft>
-                <a:spcPts val="400"/>
-              </a:spcAft>
-            </a:pPr>
-            <a:r>
-              <a:rPr sz="2800" b="0" i="0">
-                <a:solidFill>
-                  <a:srgbClr val="1F1F1F"/>
-                </a:solidFill>
-                <a:latin typeface="Arial"/>
-              </a:rPr>
-              <a:t>A.  renewable</a:t>
-            </a:r>
-          </a:p>
-          <a:p>
-            <a:pPr algn="l">
-              <a:spcAft>
-                <a:spcPts val="400"/>
-              </a:spcAft>
-            </a:pPr>
-            <a:r>
-              <a:rPr sz="2800" b="0" i="0">
-                <a:solidFill>
-                  <a:srgbClr val="1F1F1F"/>
-                </a:solidFill>
-                <a:latin typeface="Arial"/>
-              </a:rPr>
-              <a:t>B.  nonrenewable</a:t>
-            </a:r>
-          </a:p>
-          <a:p>
-            <a:pPr algn="l">
-              <a:spcAft>
-                <a:spcPts val="400"/>
-              </a:spcAft>
-            </a:pPr>
-            <a:r>
-              <a:rPr sz="2800" b="0" i="0">
-                <a:solidFill>
-                  <a:srgbClr val="1F1F1F"/>
-                </a:solidFill>
-                <a:latin typeface="Arial"/>
-              </a:rPr>
-              <a:t>C.  both</a:t>
-            </a:r>
-          </a:p>
-          <a:p>
-            <a:pPr algn="l">
-              <a:spcAft>
-                <a:spcPts val="400"/>
-              </a:spcAft>
-            </a:pPr>
-            <a:r>
-              <a:rPr sz="2800" b="0" i="0">
-                <a:solidFill>
-                  <a:srgbClr val="1F1F1F"/>
-                </a:solidFill>
-                <a:latin typeface="Arial"/>
-              </a:rPr>
-              <a:t>D.  not a resource</a:t>
+              <a:t>Draw one renewable and one nonrenewable resource.</a:t>
             </a:r>
           </a:p>
         </p:txBody>
@@ -4015,7 +4585,7 @@
             <a:avLst/>
           </a:prstGeom>
           <a:solidFill>
-            <a:srgbClr val="3E7A4E"/>
+            <a:srgbClr val="2F3C7E"/>
           </a:solidFill>
           <a:ln>
             <a:noFill/>
@@ -4078,7 +4648,7 @@
                 </a:solidFill>
                 <a:latin typeface="Arial"/>
               </a:rPr>
-              <a:t>Answer</a:t>
+              <a:t>Review</a:t>
             </a:r>
           </a:p>
         </p:txBody>
@@ -4113,11 +4683,11 @@
             <a:r>
               <a:rPr sz="1400" b="0" i="0">
                 <a:solidFill>
-                  <a:srgbClr val="FFFFFF"/>
-                </a:solidFill>
-                <a:latin typeface="Arial"/>
-              </a:rPr>
-              <a:t>12</a:t>
+                  <a:srgbClr val="C9D2E8"/>
+                </a:solidFill>
+                <a:latin typeface="Arial"/>
+              </a:rPr>
+              <a:t>11</a:t>
             </a:r>
           </a:p>
         </p:txBody>
@@ -4130,8 +4700,8 @@
         </p:nvSpPr>
         <p:spPr>
           <a:xfrm>
-            <a:off x="822960" y="1645920"/>
-            <a:ext cx="10515600" cy="1828800"/>
+            <a:off x="822960" y="1463040"/>
+            <a:ext cx="10515600" cy="1188720"/>
           </a:xfrm>
           <a:prstGeom prst="rect">
             <a:avLst/>
@@ -4156,7 +4726,94 @@
                 </a:solidFill>
                 <a:latin typeface="Arial"/>
               </a:rPr>
-              <a:t>B. Nonrenewable — it is used much faster than it forms.</a:t>
+              <a:t>Coal is plentiful now but forms over millions of years. Coal is —</a:t>
+            </a:r>
+          </a:p>
+        </p:txBody>
+      </p:sp>
+      <p:sp>
+        <p:nvSpPr>
+          <p:cNvPr id="7" name="TextBox 6"/>
+          <p:cNvSpPr txBox="1"/>
+          <p:nvPr/>
+        </p:nvSpPr>
+        <p:spPr>
+          <a:xfrm>
+            <a:off x="822960" y="2834640"/>
+            <a:ext cx="10515600" cy="3108960"/>
+          </a:xfrm>
+          <a:prstGeom prst="rect">
+            <a:avLst/>
+          </a:prstGeom>
+          <a:noFill/>
+        </p:spPr>
+        <p:txBody>
+          <a:bodyPr wrap="square" anchor="t">
+            <a:spAutoFit/>
+          </a:bodyPr>
+          <a:lstStyle/>
+          <a:p>
+            <a:pPr algn="l">
+              <a:spcAft>
+                <a:spcPts val="400"/>
+              </a:spcAft>
+            </a:pPr>
+            <a:r>
+              <a:rPr sz="2800" b="0" i="0">
+                <a:solidFill>
+                  <a:srgbClr val="1F1F1F"/>
+                </a:solidFill>
+                <a:latin typeface="Arial"/>
+              </a:rPr>
+              <a:t>A.  renewable</a:t>
+            </a:r>
+          </a:p>
+          <a:p>
+            <a:pPr algn="l">
+              <a:spcAft>
+                <a:spcPts val="400"/>
+              </a:spcAft>
+            </a:pPr>
+            <a:r>
+              <a:rPr sz="2800" b="0" i="0">
+                <a:solidFill>
+                  <a:srgbClr val="1F1F1F"/>
+                </a:solidFill>
+                <a:latin typeface="Arial"/>
+              </a:rPr>
+              <a:t>B.  nonrenewable</a:t>
+            </a:r>
+          </a:p>
+          <a:p>
+            <a:pPr algn="l">
+              <a:spcAft>
+                <a:spcPts val="400"/>
+              </a:spcAft>
+            </a:pPr>
+            <a:r>
+              <a:rPr sz="2800" b="0" i="0">
+                <a:solidFill>
+                  <a:srgbClr val="1F1F1F"/>
+                </a:solidFill>
+                <a:latin typeface="Arial"/>
+              </a:rPr>
+              <a:t>C.  both</a:t>
+            </a:r>
+          </a:p>
+          <a:p>
+            <a:pPr algn="l">
+              <a:spcAft>
+                <a:spcPts val="400"/>
+              </a:spcAft>
+            </a:pPr>
+            <a:r>
+              <a:rPr sz="2800" b="0" i="0">
+                <a:solidFill>
+                  <a:srgbClr val="1F1F1F"/>
+                </a:solidFill>
+                <a:latin typeface="Arial"/>
+              </a:rPr>
+              <a:t>D.  not a resource</a:t>
             </a:r>
           </a:p>
         </p:txBody>
@@ -4238,7 +4895,7 @@
             <a:avLst/>
           </a:prstGeom>
           <a:solidFill>
-            <a:srgbClr val="2F3C7E"/>
+            <a:srgbClr val="3E7A4E"/>
           </a:solidFill>
           <a:ln>
             <a:noFill/>
@@ -4301,7 +4958,7 @@
                 </a:solidFill>
                 <a:latin typeface="Arial"/>
               </a:rPr>
-              <a:t>Review</a:t>
+              <a:t>Answer</a:t>
             </a:r>
           </a:p>
         </p:txBody>
@@ -4336,11 +4993,11 @@
             <a:r>
               <a:rPr sz="1400" b="0" i="0">
                 <a:solidFill>
-                  <a:srgbClr val="C9D2E8"/>
-                </a:solidFill>
-                <a:latin typeface="Arial"/>
-              </a:rPr>
-              <a:t>13</a:t>
+                  <a:srgbClr val="FFFFFF"/>
+                </a:solidFill>
+                <a:latin typeface="Arial"/>
+              </a:rPr>
+              <a:t>12</a:t>
             </a:r>
           </a:p>
         </p:txBody>
@@ -4353,8 +5010,8 @@
         </p:nvSpPr>
         <p:spPr>
           <a:xfrm>
-            <a:off x="822960" y="1463040"/>
-            <a:ext cx="10515600" cy="1188720"/>
+            <a:off x="822960" y="1645920"/>
+            <a:ext cx="10515600" cy="1828800"/>
           </a:xfrm>
           <a:prstGeom prst="rect">
             <a:avLst/>
@@ -4379,94 +5036,7 @@
                 </a:solidFill>
                 <a:latin typeface="Arial"/>
               </a:rPr>
-              <a:t>Which is a renewable resource?</a:t>
-            </a:r>
-          </a:p>
-        </p:txBody>
-      </p:sp>
-      <p:sp>
-        <p:nvSpPr>
-          <p:cNvPr id="7" name="TextBox 6"/>
-          <p:cNvSpPr txBox="1"/>
-          <p:nvPr/>
-        </p:nvSpPr>
-        <p:spPr>
-          <a:xfrm>
-            <a:off x="822960" y="2834640"/>
-            <a:ext cx="10515600" cy="3108960"/>
-          </a:xfrm>
-          <a:prstGeom prst="rect">
-            <a:avLst/>
-          </a:prstGeom>
-          <a:noFill/>
-        </p:spPr>
-        <p:txBody>
-          <a:bodyPr wrap="square" anchor="t">
-            <a:spAutoFit/>
-          </a:bodyPr>
-          <a:lstStyle/>
-          <a:p>
-            <a:pPr algn="l">
-              <a:spcAft>
-                <a:spcPts val="400"/>
-              </a:spcAft>
-            </a:pPr>
-            <a:r>
-              <a:rPr sz="2800" b="0" i="0">
-                <a:solidFill>
-                  <a:srgbClr val="1F1F1F"/>
-                </a:solidFill>
-                <a:latin typeface="Arial"/>
-              </a:rPr>
-              <a:t>A.  petroleum</a:t>
-            </a:r>
-          </a:p>
-          <a:p>
-            <a:pPr algn="l">
-              <a:spcAft>
-                <a:spcPts val="400"/>
-              </a:spcAft>
-            </a:pPr>
-            <a:r>
-              <a:rPr sz="2800" b="0" i="0">
-                <a:solidFill>
-                  <a:srgbClr val="1F1F1F"/>
-                </a:solidFill>
-                <a:latin typeface="Arial"/>
-              </a:rPr>
-              <a:t>B.  natural gas</a:t>
-            </a:r>
-          </a:p>
-          <a:p>
-            <a:pPr algn="l">
-              <a:spcAft>
-                <a:spcPts val="400"/>
-              </a:spcAft>
-            </a:pPr>
-            <a:r>
-              <a:rPr sz="2800" b="0" i="0">
-                <a:solidFill>
-                  <a:srgbClr val="1F1F1F"/>
-                </a:solidFill>
-                <a:latin typeface="Arial"/>
-              </a:rPr>
-              <a:t>C.  wind</a:t>
-            </a:r>
-          </a:p>
-          <a:p>
-            <a:pPr algn="l">
-              <a:spcAft>
-                <a:spcPts val="400"/>
-              </a:spcAft>
-            </a:pPr>
-            <a:r>
-              <a:rPr sz="2800" b="0" i="0">
-                <a:solidFill>
-                  <a:srgbClr val="1F1F1F"/>
-                </a:solidFill>
-                <a:latin typeface="Arial"/>
-              </a:rPr>
-              <a:t>D.  coal</a:t>
+              <a:t>B. Nonrenewable — it is used much faster than it forms.</a:t>
             </a:r>
           </a:p>
         </p:txBody>
@@ -4548,7 +5118,7 @@
             <a:avLst/>
           </a:prstGeom>
           <a:solidFill>
-            <a:srgbClr val="3E7A4E"/>
+            <a:srgbClr val="2F3C7E"/>
           </a:solidFill>
           <a:ln>
             <a:noFill/>
@@ -4611,7 +5181,7 @@
                 </a:solidFill>
                 <a:latin typeface="Arial"/>
               </a:rPr>
-              <a:t>Answer</a:t>
+              <a:t>Review</a:t>
             </a:r>
           </a:p>
         </p:txBody>
@@ -4646,11 +5216,11 @@
             <a:r>
               <a:rPr sz="1400" b="0" i="0">
                 <a:solidFill>
-                  <a:srgbClr val="FFFFFF"/>
-                </a:solidFill>
-                <a:latin typeface="Arial"/>
-              </a:rPr>
-              <a:t>14</a:t>
+                  <a:srgbClr val="C9D2E8"/>
+                </a:solidFill>
+                <a:latin typeface="Arial"/>
+              </a:rPr>
+              <a:t>13</a:t>
             </a:r>
           </a:p>
         </p:txBody>
@@ -4663,8 +5233,8 @@
         </p:nvSpPr>
         <p:spPr>
           <a:xfrm>
-            <a:off x="822960" y="1645920"/>
-            <a:ext cx="10515600" cy="1828800"/>
+            <a:off x="822960" y="1463040"/>
+            <a:ext cx="10515600" cy="1188720"/>
           </a:xfrm>
           <a:prstGeom prst="rect">
             <a:avLst/>
@@ -4689,7 +5259,94 @@
                 </a:solidFill>
                 <a:latin typeface="Arial"/>
               </a:rPr>
-              <a:t>C. Wind is restored naturally and quickly.</a:t>
+              <a:t>Which is a renewable resource?</a:t>
+            </a:r>
+          </a:p>
+        </p:txBody>
+      </p:sp>
+      <p:sp>
+        <p:nvSpPr>
+          <p:cNvPr id="7" name="TextBox 6"/>
+          <p:cNvSpPr txBox="1"/>
+          <p:nvPr/>
+        </p:nvSpPr>
+        <p:spPr>
+          <a:xfrm>
+            <a:off x="822960" y="2834640"/>
+            <a:ext cx="10515600" cy="3108960"/>
+          </a:xfrm>
+          <a:prstGeom prst="rect">
+            <a:avLst/>
+          </a:prstGeom>
+          <a:noFill/>
+        </p:spPr>
+        <p:txBody>
+          <a:bodyPr wrap="square" anchor="t">
+            <a:spAutoFit/>
+          </a:bodyPr>
+          <a:lstStyle/>
+          <a:p>
+            <a:pPr algn="l">
+              <a:spcAft>
+                <a:spcPts val="400"/>
+              </a:spcAft>
+            </a:pPr>
+            <a:r>
+              <a:rPr sz="2800" b="0" i="0">
+                <a:solidFill>
+                  <a:srgbClr val="1F1F1F"/>
+                </a:solidFill>
+                <a:latin typeface="Arial"/>
+              </a:rPr>
+              <a:t>A.  petroleum</a:t>
+            </a:r>
+          </a:p>
+          <a:p>
+            <a:pPr algn="l">
+              <a:spcAft>
+                <a:spcPts val="400"/>
+              </a:spcAft>
+            </a:pPr>
+            <a:r>
+              <a:rPr sz="2800" b="0" i="0">
+                <a:solidFill>
+                  <a:srgbClr val="1F1F1F"/>
+                </a:solidFill>
+                <a:latin typeface="Arial"/>
+              </a:rPr>
+              <a:t>B.  natural gas</a:t>
+            </a:r>
+          </a:p>
+          <a:p>
+            <a:pPr algn="l">
+              <a:spcAft>
+                <a:spcPts val="400"/>
+              </a:spcAft>
+            </a:pPr>
+            <a:r>
+              <a:rPr sz="2800" b="0" i="0">
+                <a:solidFill>
+                  <a:srgbClr val="1F1F1F"/>
+                </a:solidFill>
+                <a:latin typeface="Arial"/>
+              </a:rPr>
+              <a:t>C.  wind</a:t>
+            </a:r>
+          </a:p>
+          <a:p>
+            <a:pPr algn="l">
+              <a:spcAft>
+                <a:spcPts val="400"/>
+              </a:spcAft>
+            </a:pPr>
+            <a:r>
+              <a:rPr sz="2800" b="0" i="0">
+                <a:solidFill>
+                  <a:srgbClr val="1F1F1F"/>
+                </a:solidFill>
+                <a:latin typeface="Arial"/>
+              </a:rPr>
+              <a:t>D.  coal</a:t>
             </a:r>
           </a:p>
         </p:txBody>
@@ -4771,7 +5428,7 @@
             <a:avLst/>
           </a:prstGeom>
           <a:solidFill>
-            <a:srgbClr val="2F3C7E"/>
+            <a:srgbClr val="3E7A4E"/>
           </a:solidFill>
           <a:ln>
             <a:noFill/>
@@ -4834,7 +5491,7 @@
                 </a:solidFill>
                 <a:latin typeface="Arial"/>
               </a:rPr>
-              <a:t>Review</a:t>
+              <a:t>Answer</a:t>
             </a:r>
           </a:p>
         </p:txBody>
@@ -4869,11 +5526,11 @@
             <a:r>
               <a:rPr sz="1400" b="0" i="0">
                 <a:solidFill>
-                  <a:srgbClr val="C9D2E8"/>
-                </a:solidFill>
-                <a:latin typeface="Arial"/>
-              </a:rPr>
-              <a:t>15</a:t>
+                  <a:srgbClr val="FFFFFF"/>
+                </a:solidFill>
+                <a:latin typeface="Arial"/>
+              </a:rPr>
+              <a:t>14</a:t>
             </a:r>
           </a:p>
         </p:txBody>
@@ -4886,8 +5543,8 @@
         </p:nvSpPr>
         <p:spPr>
           <a:xfrm>
-            <a:off x="822960" y="1463040"/>
-            <a:ext cx="10515600" cy="1188720"/>
+            <a:off x="822960" y="1645920"/>
+            <a:ext cx="10515600" cy="1828800"/>
           </a:xfrm>
           <a:prstGeom prst="rect">
             <a:avLst/>
@@ -4912,94 +5569,7 @@
                 </a:solidFill>
                 <a:latin typeface="Arial"/>
               </a:rPr>
-              <a:t>Sunlight is renewable but not always available. Why?</a:t>
-            </a:r>
-          </a:p>
-        </p:txBody>
-      </p:sp>
-      <p:sp>
-        <p:nvSpPr>
-          <p:cNvPr id="7" name="TextBox 6"/>
-          <p:cNvSpPr txBox="1"/>
-          <p:nvPr/>
-        </p:nvSpPr>
-        <p:spPr>
-          <a:xfrm>
-            <a:off x="822960" y="2834640"/>
-            <a:ext cx="10515600" cy="3108960"/>
-          </a:xfrm>
-          <a:prstGeom prst="rect">
-            <a:avLst/>
-          </a:prstGeom>
-          <a:noFill/>
-        </p:spPr>
-        <p:txBody>
-          <a:bodyPr wrap="square" anchor="t">
-            <a:spAutoFit/>
-          </a:bodyPr>
-          <a:lstStyle/>
-          <a:p>
-            <a:pPr algn="l">
-              <a:spcAft>
-                <a:spcPts val="400"/>
-              </a:spcAft>
-            </a:pPr>
-            <a:r>
-              <a:rPr sz="2800" b="0" i="0">
-                <a:solidFill>
-                  <a:srgbClr val="1F1F1F"/>
-                </a:solidFill>
-                <a:latin typeface="Arial"/>
-              </a:rPr>
-              <a:t>A.  the sun disappears forever</a:t>
-            </a:r>
-          </a:p>
-          <a:p>
-            <a:pPr algn="l">
-              <a:spcAft>
-                <a:spcPts val="400"/>
-              </a:spcAft>
-            </a:pPr>
-            <a:r>
-              <a:rPr sz="2800" b="0" i="0">
-                <a:solidFill>
-                  <a:srgbClr val="1F1F1F"/>
-                </a:solidFill>
-                <a:latin typeface="Arial"/>
-              </a:rPr>
-              <a:t>B.  some places/times get little sunlight</a:t>
-            </a:r>
-          </a:p>
-          <a:p>
-            <a:pPr algn="l">
-              <a:spcAft>
-                <a:spcPts val="400"/>
-              </a:spcAft>
-            </a:pPr>
-            <a:r>
-              <a:rPr sz="2800" b="0" i="0">
-                <a:solidFill>
-                  <a:srgbClr val="1F1F1F"/>
-                </a:solidFill>
-                <a:latin typeface="Arial"/>
-              </a:rPr>
-              <a:t>C.  solar cells break</a:t>
-            </a:r>
-          </a:p>
-          <a:p>
-            <a:pPr algn="l">
-              <a:spcAft>
-                <a:spcPts val="400"/>
-              </a:spcAft>
-            </a:pPr>
-            <a:r>
-              <a:rPr sz="2800" b="0" i="0">
-                <a:solidFill>
-                  <a:srgbClr val="1F1F1F"/>
-                </a:solidFill>
-                <a:latin typeface="Arial"/>
-              </a:rPr>
-              <a:t>D.  sunlight is nonrenewable</a:t>
+              <a:t>C. Wind is restored naturally and quickly.</a:t>
             </a:r>
           </a:p>
         </p:txBody>
@@ -5081,7 +5651,7 @@
             <a:avLst/>
           </a:prstGeom>
           <a:solidFill>
-            <a:srgbClr val="3E7A4E"/>
+            <a:srgbClr val="2F3C7E"/>
           </a:solidFill>
           <a:ln>
             <a:noFill/>
@@ -5144,7 +5714,7 @@
                 </a:solidFill>
                 <a:latin typeface="Arial"/>
               </a:rPr>
-              <a:t>Answer</a:t>
+              <a:t>Review</a:t>
             </a:r>
           </a:p>
         </p:txBody>
@@ -5179,11 +5749,11 @@
             <a:r>
               <a:rPr sz="1400" b="0" i="0">
                 <a:solidFill>
-                  <a:srgbClr val="FFFFFF"/>
-                </a:solidFill>
-                <a:latin typeface="Arial"/>
-              </a:rPr>
-              <a:t>16</a:t>
+                  <a:srgbClr val="C9D2E8"/>
+                </a:solidFill>
+                <a:latin typeface="Arial"/>
+              </a:rPr>
+              <a:t>15</a:t>
             </a:r>
           </a:p>
         </p:txBody>
@@ -5196,8 +5766,8 @@
         </p:nvSpPr>
         <p:spPr>
           <a:xfrm>
-            <a:off x="822960" y="1645920"/>
-            <a:ext cx="10515600" cy="1828800"/>
+            <a:off x="822960" y="1463040"/>
+            <a:ext cx="10515600" cy="1188720"/>
           </a:xfrm>
           <a:prstGeom prst="rect">
             <a:avLst/>
@@ -5222,7 +5792,94 @@
                 </a:solidFill>
                 <a:latin typeface="Arial"/>
               </a:rPr>
-              <a:t>B. Location and time of day/year affect available sunlight.</a:t>
+              <a:t>Sunlight is renewable but not always available. Why?</a:t>
+            </a:r>
+          </a:p>
+        </p:txBody>
+      </p:sp>
+      <p:sp>
+        <p:nvSpPr>
+          <p:cNvPr id="7" name="TextBox 6"/>
+          <p:cNvSpPr txBox="1"/>
+          <p:nvPr/>
+        </p:nvSpPr>
+        <p:spPr>
+          <a:xfrm>
+            <a:off x="822960" y="2834640"/>
+            <a:ext cx="10515600" cy="3108960"/>
+          </a:xfrm>
+          <a:prstGeom prst="rect">
+            <a:avLst/>
+          </a:prstGeom>
+          <a:noFill/>
+        </p:spPr>
+        <p:txBody>
+          <a:bodyPr wrap="square" anchor="t">
+            <a:spAutoFit/>
+          </a:bodyPr>
+          <a:lstStyle/>
+          <a:p>
+            <a:pPr algn="l">
+              <a:spcAft>
+                <a:spcPts val="400"/>
+              </a:spcAft>
+            </a:pPr>
+            <a:r>
+              <a:rPr sz="2800" b="0" i="0">
+                <a:solidFill>
+                  <a:srgbClr val="1F1F1F"/>
+                </a:solidFill>
+                <a:latin typeface="Arial"/>
+              </a:rPr>
+              <a:t>A.  the sun disappears forever</a:t>
+            </a:r>
+          </a:p>
+          <a:p>
+            <a:pPr algn="l">
+              <a:spcAft>
+                <a:spcPts val="400"/>
+              </a:spcAft>
+            </a:pPr>
+            <a:r>
+              <a:rPr sz="2800" b="0" i="0">
+                <a:solidFill>
+                  <a:srgbClr val="1F1F1F"/>
+                </a:solidFill>
+                <a:latin typeface="Arial"/>
+              </a:rPr>
+              <a:t>B.  some places/times get little sunlight</a:t>
+            </a:r>
+          </a:p>
+          <a:p>
+            <a:pPr algn="l">
+              <a:spcAft>
+                <a:spcPts val="400"/>
+              </a:spcAft>
+            </a:pPr>
+            <a:r>
+              <a:rPr sz="2800" b="0" i="0">
+                <a:solidFill>
+                  <a:srgbClr val="1F1F1F"/>
+                </a:solidFill>
+                <a:latin typeface="Arial"/>
+              </a:rPr>
+              <a:t>C.  solar cells break</a:t>
+            </a:r>
+          </a:p>
+          <a:p>
+            <a:pPr algn="l">
+              <a:spcAft>
+                <a:spcPts val="400"/>
+              </a:spcAft>
+            </a:pPr>
+            <a:r>
+              <a:rPr sz="2800" b="0" i="0">
+                <a:solidFill>
+                  <a:srgbClr val="1F1F1F"/>
+                </a:solidFill>
+                <a:latin typeface="Arial"/>
+              </a:rPr>
+              <a:t>D.  sunlight is nonrenewable</a:t>
             </a:r>
           </a:p>
         </p:txBody>
@@ -5304,7 +5961,7 @@
             <a:avLst/>
           </a:prstGeom>
           <a:solidFill>
-            <a:srgbClr val="2F3C7E"/>
+            <a:srgbClr val="3E7A4E"/>
           </a:solidFill>
           <a:ln>
             <a:noFill/>
@@ -5367,7 +6024,7 @@
                 </a:solidFill>
                 <a:latin typeface="Arial"/>
               </a:rPr>
-              <a:t>Review</a:t>
+              <a:t>Answer</a:t>
             </a:r>
           </a:p>
         </p:txBody>
@@ -5402,11 +6059,11 @@
             <a:r>
               <a:rPr sz="1400" b="0" i="0">
                 <a:solidFill>
-                  <a:srgbClr val="C9D2E8"/>
-                </a:solidFill>
-                <a:latin typeface="Arial"/>
-              </a:rPr>
-              <a:t>17</a:t>
+                  <a:srgbClr val="FFFFFF"/>
+                </a:solidFill>
+                <a:latin typeface="Arial"/>
+              </a:rPr>
+              <a:t>16</a:t>
             </a:r>
           </a:p>
         </p:txBody>
@@ -5419,8 +6076,8 @@
         </p:nvSpPr>
         <p:spPr>
           <a:xfrm>
-            <a:off x="822960" y="1463040"/>
-            <a:ext cx="10515600" cy="1188720"/>
+            <a:off x="822960" y="1645920"/>
+            <a:ext cx="10515600" cy="1828800"/>
           </a:xfrm>
           <a:prstGeom prst="rect">
             <a:avLst/>
@@ -5445,94 +6102,7 @@
                 </a:solidFill>
                 <a:latin typeface="Arial"/>
               </a:rPr>
-              <a:t>What makes a resource renewable?</a:t>
-            </a:r>
-          </a:p>
-        </p:txBody>
-      </p:sp>
-      <p:sp>
-        <p:nvSpPr>
-          <p:cNvPr id="7" name="TextBox 6"/>
-          <p:cNvSpPr txBox="1"/>
-          <p:nvPr/>
-        </p:nvSpPr>
-        <p:spPr>
-          <a:xfrm>
-            <a:off x="822960" y="2834640"/>
-            <a:ext cx="10515600" cy="3108960"/>
-          </a:xfrm>
-          <a:prstGeom prst="rect">
-            <a:avLst/>
-          </a:prstGeom>
-          <a:noFill/>
-        </p:spPr>
-        <p:txBody>
-          <a:bodyPr wrap="square" anchor="t">
-            <a:spAutoFit/>
-          </a:bodyPr>
-          <a:lstStyle/>
-          <a:p>
-            <a:pPr algn="l">
-              <a:spcAft>
-                <a:spcPts val="400"/>
-              </a:spcAft>
-            </a:pPr>
-            <a:r>
-              <a:rPr sz="2800" b="0" i="0">
-                <a:solidFill>
-                  <a:srgbClr val="1F1F1F"/>
-                </a:solidFill>
-                <a:latin typeface="Arial"/>
-              </a:rPr>
-              <a:t>A.  it is abundant</a:t>
-            </a:r>
-          </a:p>
-          <a:p>
-            <a:pPr algn="l">
-              <a:spcAft>
-                <a:spcPts val="400"/>
-              </a:spcAft>
-            </a:pPr>
-            <a:r>
-              <a:rPr sz="2800" b="0" i="0">
-                <a:solidFill>
-                  <a:srgbClr val="1F1F1F"/>
-                </a:solidFill>
-                <a:latin typeface="Arial"/>
-              </a:rPr>
-              <a:t>B.  it is cheap</a:t>
-            </a:r>
-          </a:p>
-          <a:p>
-            <a:pPr algn="l">
-              <a:spcAft>
-                <a:spcPts val="400"/>
-              </a:spcAft>
-            </a:pPr>
-            <a:r>
-              <a:rPr sz="2800" b="0" i="0">
-                <a:solidFill>
-                  <a:srgbClr val="1F1F1F"/>
-                </a:solidFill>
-                <a:latin typeface="Arial"/>
-              </a:rPr>
-              <a:t>C.  it is restored as quickly as it is used</a:t>
-            </a:r>
-          </a:p>
-          <a:p>
-            <a:pPr algn="l">
-              <a:spcAft>
-                <a:spcPts val="400"/>
-              </a:spcAft>
-            </a:pPr>
-            <a:r>
-              <a:rPr sz="2800" b="0" i="0">
-                <a:solidFill>
-                  <a:srgbClr val="1F1F1F"/>
-                </a:solidFill>
-                <a:latin typeface="Arial"/>
-              </a:rPr>
-              <a:t>D.  it comes from the ground</a:t>
+              <a:t>B. Location and time of day/year affect available sunlight.</a:t>
             </a:r>
           </a:p>
         </p:txBody>
@@ -5614,7 +6184,7 @@
             <a:avLst/>
           </a:prstGeom>
           <a:solidFill>
-            <a:srgbClr val="3E7A4E"/>
+            <a:srgbClr val="2F3C7E"/>
           </a:solidFill>
           <a:ln>
             <a:noFill/>
@@ -5677,7 +6247,7 @@
                 </a:solidFill>
                 <a:latin typeface="Arial"/>
               </a:rPr>
-              <a:t>Answer</a:t>
+              <a:t>Review</a:t>
             </a:r>
           </a:p>
         </p:txBody>
@@ -5712,11 +6282,11 @@
             <a:r>
               <a:rPr sz="1400" b="0" i="0">
                 <a:solidFill>
-                  <a:srgbClr val="FFFFFF"/>
-                </a:solidFill>
-                <a:latin typeface="Arial"/>
-              </a:rPr>
-              <a:t>18</a:t>
+                  <a:srgbClr val="C9D2E8"/>
+                </a:solidFill>
+                <a:latin typeface="Arial"/>
+              </a:rPr>
+              <a:t>17</a:t>
             </a:r>
           </a:p>
         </p:txBody>
@@ -5729,8 +6299,8 @@
         </p:nvSpPr>
         <p:spPr>
           <a:xfrm>
-            <a:off x="822960" y="1645920"/>
-            <a:ext cx="10515600" cy="1828800"/>
+            <a:off x="822960" y="1463040"/>
+            <a:ext cx="10515600" cy="1188720"/>
           </a:xfrm>
           <a:prstGeom prst="rect">
             <a:avLst/>
@@ -5755,7 +6325,94 @@
                 </a:solidFill>
                 <a:latin typeface="Arial"/>
               </a:rPr>
-              <a:t>C. Renewability is about how fast it is restored vs. used.</a:t>
+              <a:t>What makes a resource renewable?</a:t>
+            </a:r>
+          </a:p>
+        </p:txBody>
+      </p:sp>
+      <p:sp>
+        <p:nvSpPr>
+          <p:cNvPr id="7" name="TextBox 6"/>
+          <p:cNvSpPr txBox="1"/>
+          <p:nvPr/>
+        </p:nvSpPr>
+        <p:spPr>
+          <a:xfrm>
+            <a:off x="822960" y="2834640"/>
+            <a:ext cx="10515600" cy="3108960"/>
+          </a:xfrm>
+          <a:prstGeom prst="rect">
+            <a:avLst/>
+          </a:prstGeom>
+          <a:noFill/>
+        </p:spPr>
+        <p:txBody>
+          <a:bodyPr wrap="square" anchor="t">
+            <a:spAutoFit/>
+          </a:bodyPr>
+          <a:lstStyle/>
+          <a:p>
+            <a:pPr algn="l">
+              <a:spcAft>
+                <a:spcPts val="400"/>
+              </a:spcAft>
+            </a:pPr>
+            <a:r>
+              <a:rPr sz="2800" b="0" i="0">
+                <a:solidFill>
+                  <a:srgbClr val="1F1F1F"/>
+                </a:solidFill>
+                <a:latin typeface="Arial"/>
+              </a:rPr>
+              <a:t>A.  it is abundant</a:t>
+            </a:r>
+          </a:p>
+          <a:p>
+            <a:pPr algn="l">
+              <a:spcAft>
+                <a:spcPts val="400"/>
+              </a:spcAft>
+            </a:pPr>
+            <a:r>
+              <a:rPr sz="2800" b="0" i="0">
+                <a:solidFill>
+                  <a:srgbClr val="1F1F1F"/>
+                </a:solidFill>
+                <a:latin typeface="Arial"/>
+              </a:rPr>
+              <a:t>B.  it is cheap</a:t>
+            </a:r>
+          </a:p>
+          <a:p>
+            <a:pPr algn="l">
+              <a:spcAft>
+                <a:spcPts val="400"/>
+              </a:spcAft>
+            </a:pPr>
+            <a:r>
+              <a:rPr sz="2800" b="0" i="0">
+                <a:solidFill>
+                  <a:srgbClr val="1F1F1F"/>
+                </a:solidFill>
+                <a:latin typeface="Arial"/>
+              </a:rPr>
+              <a:t>C.  it is restored as quickly as it is used</a:t>
+            </a:r>
+          </a:p>
+          <a:p>
+            <a:pPr algn="l">
+              <a:spcAft>
+                <a:spcPts val="400"/>
+              </a:spcAft>
+            </a:pPr>
+            <a:r>
+              <a:rPr sz="2800" b="0" i="0">
+                <a:solidFill>
+                  <a:srgbClr val="1F1F1F"/>
+                </a:solidFill>
+                <a:latin typeface="Arial"/>
+              </a:rPr>
+              <a:t>D.  it comes from the ground</a:t>
             </a:r>
           </a:p>
         </p:txBody>
@@ -5837,7 +6494,7 @@
             <a:avLst/>
           </a:prstGeom>
           <a:solidFill>
-            <a:srgbClr val="2F3C7E"/>
+            <a:srgbClr val="3E7A4E"/>
           </a:solidFill>
           <a:ln>
             <a:noFill/>
@@ -5900,7 +6557,7 @@
                 </a:solidFill>
                 <a:latin typeface="Arial"/>
               </a:rPr>
-              <a:t>Review</a:t>
+              <a:t>Answer</a:t>
             </a:r>
           </a:p>
         </p:txBody>
@@ -5935,11 +6592,11 @@
             <a:r>
               <a:rPr sz="1400" b="0" i="0">
                 <a:solidFill>
-                  <a:srgbClr val="C9D2E8"/>
-                </a:solidFill>
-                <a:latin typeface="Arial"/>
-              </a:rPr>
-              <a:t>19</a:t>
+                  <a:srgbClr val="FFFFFF"/>
+                </a:solidFill>
+                <a:latin typeface="Arial"/>
+              </a:rPr>
+              <a:t>18</a:t>
             </a:r>
           </a:p>
         </p:txBody>
@@ -5952,8 +6609,8 @@
         </p:nvSpPr>
         <p:spPr>
           <a:xfrm>
-            <a:off x="822960" y="1463040"/>
-            <a:ext cx="10515600" cy="1188720"/>
+            <a:off x="822960" y="1645920"/>
+            <a:ext cx="10515600" cy="1828800"/>
           </a:xfrm>
           <a:prstGeom prst="rect">
             <a:avLst/>
@@ -5978,94 +6635,7 @@
                 </a:solidFill>
                 <a:latin typeface="Arial"/>
               </a:rPr>
-              <a:t>A resource can be abundant and still be —</a:t>
-            </a:r>
-          </a:p>
-        </p:txBody>
-      </p:sp>
-      <p:sp>
-        <p:nvSpPr>
-          <p:cNvPr id="7" name="TextBox 6"/>
-          <p:cNvSpPr txBox="1"/>
-          <p:nvPr/>
-        </p:nvSpPr>
-        <p:spPr>
-          <a:xfrm>
-            <a:off x="822960" y="2834640"/>
-            <a:ext cx="10515600" cy="3108960"/>
-          </a:xfrm>
-          <a:prstGeom prst="rect">
-            <a:avLst/>
-          </a:prstGeom>
-          <a:noFill/>
-        </p:spPr>
-        <p:txBody>
-          <a:bodyPr wrap="square" anchor="t">
-            <a:spAutoFit/>
-          </a:bodyPr>
-          <a:lstStyle/>
-          <a:p>
-            <a:pPr algn="l">
-              <a:spcAft>
-                <a:spcPts val="400"/>
-              </a:spcAft>
-            </a:pPr>
-            <a:r>
-              <a:rPr sz="2800" b="0" i="0">
-                <a:solidFill>
-                  <a:srgbClr val="1F1F1F"/>
-                </a:solidFill>
-                <a:latin typeface="Arial"/>
-              </a:rPr>
-              <a:t>A.  renewable</a:t>
-            </a:r>
-          </a:p>
-          <a:p>
-            <a:pPr algn="l">
-              <a:spcAft>
-                <a:spcPts val="400"/>
-              </a:spcAft>
-            </a:pPr>
-            <a:r>
-              <a:rPr sz="2800" b="0" i="0">
-                <a:solidFill>
-                  <a:srgbClr val="1F1F1F"/>
-                </a:solidFill>
-                <a:latin typeface="Arial"/>
-              </a:rPr>
-              <a:t>B.  free</a:t>
-            </a:r>
-          </a:p>
-          <a:p>
-            <a:pPr algn="l">
-              <a:spcAft>
-                <a:spcPts val="400"/>
-              </a:spcAft>
-            </a:pPr>
-            <a:r>
-              <a:rPr sz="2800" b="0" i="0">
-                <a:solidFill>
-                  <a:srgbClr val="1F1F1F"/>
-                </a:solidFill>
-                <a:latin typeface="Arial"/>
-              </a:rPr>
-              <a:t>C.  nonrenewable</a:t>
-            </a:r>
-          </a:p>
-          <a:p>
-            <a:pPr algn="l">
-              <a:spcAft>
-                <a:spcPts val="400"/>
-              </a:spcAft>
-            </a:pPr>
-            <a:r>
-              <a:rPr sz="2800" b="0" i="0">
-                <a:solidFill>
-                  <a:srgbClr val="1F1F1F"/>
-                </a:solidFill>
-                <a:latin typeface="Arial"/>
-              </a:rPr>
-              <a:t>D.  water</a:t>
+              <a:t>C. Renewability is about how fast it is restored vs. used.</a:t>
             </a:r>
           </a:p>
         </p:txBody>
@@ -6370,7 +6940,7 @@
             <a:avLst/>
           </a:prstGeom>
           <a:solidFill>
-            <a:srgbClr val="3E7A4E"/>
+            <a:srgbClr val="2F3C7E"/>
           </a:solidFill>
           <a:ln>
             <a:noFill/>
@@ -6433,7 +7003,7 @@
                 </a:solidFill>
                 <a:latin typeface="Arial"/>
               </a:rPr>
-              <a:t>Answer</a:t>
+              <a:t>Review</a:t>
             </a:r>
           </a:p>
         </p:txBody>
@@ -6468,11 +7038,11 @@
             <a:r>
               <a:rPr sz="1400" b="0" i="0">
                 <a:solidFill>
-                  <a:srgbClr val="FFFFFF"/>
-                </a:solidFill>
-                <a:latin typeface="Arial"/>
-              </a:rPr>
-              <a:t>20</a:t>
+                  <a:srgbClr val="C9D2E8"/>
+                </a:solidFill>
+                <a:latin typeface="Arial"/>
+              </a:rPr>
+              <a:t>19</a:t>
             </a:r>
           </a:p>
         </p:txBody>
@@ -6485,8 +7055,8 @@
         </p:nvSpPr>
         <p:spPr>
           <a:xfrm>
-            <a:off x="822960" y="1645920"/>
-            <a:ext cx="10515600" cy="1828800"/>
+            <a:off x="822960" y="1463040"/>
+            <a:ext cx="10515600" cy="1188720"/>
           </a:xfrm>
           <a:prstGeom prst="rect">
             <a:avLst/>
@@ -6511,7 +7081,94 @@
                 </a:solidFill>
                 <a:latin typeface="Arial"/>
               </a:rPr>
-              <a:t>C. Abundant does NOT mean renewable.</a:t>
+              <a:t>A resource can be abundant and still be —</a:t>
+            </a:r>
+          </a:p>
+        </p:txBody>
+      </p:sp>
+      <p:sp>
+        <p:nvSpPr>
+          <p:cNvPr id="7" name="TextBox 6"/>
+          <p:cNvSpPr txBox="1"/>
+          <p:nvPr/>
+        </p:nvSpPr>
+        <p:spPr>
+          <a:xfrm>
+            <a:off x="822960" y="2834640"/>
+            <a:ext cx="10515600" cy="3108960"/>
+          </a:xfrm>
+          <a:prstGeom prst="rect">
+            <a:avLst/>
+          </a:prstGeom>
+          <a:noFill/>
+        </p:spPr>
+        <p:txBody>
+          <a:bodyPr wrap="square" anchor="t">
+            <a:spAutoFit/>
+          </a:bodyPr>
+          <a:lstStyle/>
+          <a:p>
+            <a:pPr algn="l">
+              <a:spcAft>
+                <a:spcPts val="400"/>
+              </a:spcAft>
+            </a:pPr>
+            <a:r>
+              <a:rPr sz="2800" b="0" i="0">
+                <a:solidFill>
+                  <a:srgbClr val="1F1F1F"/>
+                </a:solidFill>
+                <a:latin typeface="Arial"/>
+              </a:rPr>
+              <a:t>A.  renewable</a:t>
+            </a:r>
+          </a:p>
+          <a:p>
+            <a:pPr algn="l">
+              <a:spcAft>
+                <a:spcPts val="400"/>
+              </a:spcAft>
+            </a:pPr>
+            <a:r>
+              <a:rPr sz="2800" b="0" i="0">
+                <a:solidFill>
+                  <a:srgbClr val="1F1F1F"/>
+                </a:solidFill>
+                <a:latin typeface="Arial"/>
+              </a:rPr>
+              <a:t>B.  free</a:t>
+            </a:r>
+          </a:p>
+          <a:p>
+            <a:pPr algn="l">
+              <a:spcAft>
+                <a:spcPts val="400"/>
+              </a:spcAft>
+            </a:pPr>
+            <a:r>
+              <a:rPr sz="2800" b="0" i="0">
+                <a:solidFill>
+                  <a:srgbClr val="1F1F1F"/>
+                </a:solidFill>
+                <a:latin typeface="Arial"/>
+              </a:rPr>
+              <a:t>C.  nonrenewable</a:t>
+            </a:r>
+          </a:p>
+          <a:p>
+            <a:pPr algn="l">
+              <a:spcAft>
+                <a:spcPts val="400"/>
+              </a:spcAft>
+            </a:pPr>
+            <a:r>
+              <a:rPr sz="2800" b="0" i="0">
+                <a:solidFill>
+                  <a:srgbClr val="1F1F1F"/>
+                </a:solidFill>
+                <a:latin typeface="Arial"/>
+              </a:rPr>
+              <a:t>D.  water</a:t>
             </a:r>
           </a:p>
         </p:txBody>
@@ -6525,7 +7182,7 @@
 </file>
 
 <file path=ppt/slides/slide21.xml><?xml version="1.0" encoding="utf-8"?>
-<p:sld xmlns:a="http://schemas.openxmlformats.org/drawingml/2006/main" xmlns:r="http://schemas.openxmlformats.org/officeDocument/2006/relationships" xmlns:p="http://schemas.openxmlformats.org/presentationml/2006/main">
+<p:sld xmlns:a="http://schemas.openxmlformats.org/drawingml/2006/main" xmlns:p="http://schemas.openxmlformats.org/presentationml/2006/main" xmlns:r="http://schemas.openxmlformats.org/officeDocument/2006/relationships">
   <p:cSld>
     <p:spTree>
       <p:nvGrpSpPr>
@@ -6587,13 +7244,13 @@
         <p:spPr>
           <a:xfrm>
             <a:off x="0" y="0"/>
-            <a:ext cx="12191695" cy="1417320"/>
+            <a:ext cx="12191695" cy="822960"/>
           </a:xfrm>
           <a:prstGeom prst="rect">
             <a:avLst/>
           </a:prstGeom>
           <a:solidFill>
-            <a:srgbClr val="2F3C7E"/>
+            <a:srgbClr val="3E7A4E"/>
           </a:solidFill>
           <a:ln>
             <a:noFill/>
@@ -6630,8 +7287,8 @@
         </p:nvSpPr>
         <p:spPr>
           <a:xfrm>
-            <a:off x="457200" y="109728"/>
-            <a:ext cx="10424160" cy="868680"/>
+            <a:off x="457200" y="146304"/>
+            <a:ext cx="10515600" cy="548640"/>
           </a:xfrm>
           <a:prstGeom prst="rect">
             <a:avLst/>
@@ -6650,13 +7307,13 @@
               </a:spcAft>
             </a:pPr>
             <a:r>
-              <a:rPr sz="3200" b="1">
+              <a:rPr sz="2400" b="1" i="0">
                 <a:solidFill>
                   <a:srgbClr val="FFFFFF"/>
                 </a:solidFill>
                 <a:latin typeface="Arial"/>
               </a:rPr>
-              <a:t>Where Does Our Energy Come From?</a:t>
+              <a:t>Answer</a:t>
             </a:r>
           </a:p>
         </p:txBody>
@@ -6669,8 +7326,8 @@
         </p:nvSpPr>
         <p:spPr>
           <a:xfrm>
-            <a:off x="457200" y="1024128"/>
-            <a:ext cx="10424160" cy="329184"/>
+            <a:off x="10424160" y="256032"/>
+            <a:ext cx="731520" cy="365760"/>
           </a:xfrm>
           <a:prstGeom prst="rect">
             <a:avLst/>
@@ -6678,7 +7335,46 @@
           <a:noFill/>
         </p:spPr>
         <p:txBody>
-          <a:bodyPr wrap="square" anchor="ctr">
+          <a:bodyPr wrap="square" anchor="t">
+            <a:spAutoFit/>
+          </a:bodyPr>
+          <a:lstStyle/>
+          <a:p>
+            <a:pPr algn="r">
+              <a:spcAft>
+                <a:spcPts val="400"/>
+              </a:spcAft>
+            </a:pPr>
+            <a:r>
+              <a:rPr sz="1400" b="0" i="0">
+                <a:solidFill>
+                  <a:srgbClr val="FFFFFF"/>
+                </a:solidFill>
+                <a:latin typeface="Arial"/>
+              </a:rPr>
+              <a:t>20</a:t>
+            </a:r>
+          </a:p>
+        </p:txBody>
+      </p:sp>
+      <p:sp>
+        <p:nvSpPr>
+          <p:cNvPr id="6" name="TextBox 5"/>
+          <p:cNvSpPr txBox="1"/>
+          <p:nvPr/>
+        </p:nvSpPr>
+        <p:spPr>
+          <a:xfrm>
+            <a:off x="822960" y="1645920"/>
+            <a:ext cx="10515600" cy="1828800"/>
+          </a:xfrm>
+          <a:prstGeom prst="rect">
+            <a:avLst/>
+          </a:prstGeom>
+          <a:noFill/>
+        </p:spPr>
+        <p:txBody>
+          <a:bodyPr wrap="square" anchor="t">
             <a:spAutoFit/>
           </a:bodyPr>
           <a:lstStyle/>
@@ -6689,72 +7385,75 @@
               </a:spcAft>
             </a:pPr>
             <a:r>
-              <a:rPr sz="1500" b="0">
-                <a:solidFill>
-                  <a:srgbClr val="C9D2E8"/>
-                </a:solidFill>
-                <a:latin typeface="Arial"/>
-              </a:rPr>
-              <a:t>Media placeholder · optional video · pending generation</a:t>
-            </a:r>
-          </a:p>
-        </p:txBody>
-      </p:sp>
-      <p:sp>
-        <p:nvSpPr>
-          <p:cNvPr id="6" name="TextBox 5"/>
-          <p:cNvSpPr txBox="1"/>
-          <p:nvPr/>
-        </p:nvSpPr>
-        <p:spPr>
-          <a:xfrm>
-            <a:off x="10607040" y="310896"/>
-            <a:ext cx="731520" cy="365760"/>
-          </a:xfrm>
-          <a:prstGeom prst="rect">
-            <a:avLst/>
-          </a:prstGeom>
-          <a:noFill/>
-        </p:spPr>
-        <p:txBody>
-          <a:bodyPr wrap="square" anchor="ctr">
-            <a:spAutoFit/>
-          </a:bodyPr>
-          <a:lstStyle/>
-          <a:p>
-            <a:pPr algn="r">
-              <a:spcAft>
-                <a:spcPts val="400"/>
-              </a:spcAft>
-            </a:pPr>
-            <a:r>
-              <a:rPr sz="1500" b="0">
-                <a:solidFill>
-                  <a:srgbClr val="C9D2E8"/>
-                </a:solidFill>
-                <a:latin typeface="Arial"/>
-              </a:rPr>
-              <a:t>4</a:t>
-            </a:r>
-          </a:p>
-        </p:txBody>
-      </p:sp>
-      <p:sp>
-        <p:nvSpPr>
-          <p:cNvPr id="7" name="Rounded Rectangle 6"/>
+              <a:rPr sz="3000" b="1" i="0">
+                <a:solidFill>
+                  <a:srgbClr val="1F1F1F"/>
+                </a:solidFill>
+                <a:latin typeface="Arial"/>
+              </a:rPr>
+              <a:t>C. Abundant does NOT mean renewable.</a:t>
+            </a:r>
+          </a:p>
+        </p:txBody>
+      </p:sp>
+    </p:spTree>
+  </p:cSld>
+  <p:clrMapOvr>
+    <a:masterClrMapping/>
+  </p:clrMapOvr>
+</p:sld>
+</file>
+
+<file path=ppt/slides/slide22.xml><?xml version="1.0" encoding="utf-8"?>
+<p:sld xmlns:a="http://schemas.openxmlformats.org/drawingml/2006/main" xmlns:p="http://schemas.openxmlformats.org/presentationml/2006/main" xmlns:r="http://schemas.openxmlformats.org/officeDocument/2006/relationships">
+  <p:cSld>
+    <p:spTree>
+      <p:nvGrpSpPr>
+        <p:cNvPr id="1" name=""/>
+        <p:cNvGrpSpPr/>
+        <p:nvPr/>
+      </p:nvGrpSpPr>
+      <p:grpSpPr/>
+      <p:pic>
+        <p:nvPicPr>
+          <p:cNvPr id="2" name="Picture 1" descr="unit2-renewable-nonrenewable-resources.png"/>
+          <p:cNvPicPr>
+            <a:picLocks noChangeAspect="1"/>
+          </p:cNvPicPr>
+          <p:nvPr/>
+        </p:nvPicPr>
+        <p:blipFill>
+          <a:blip r:embed="rId2"/>
+          <a:stretch>
+            <a:fillRect/>
+          </a:stretch>
+        </p:blipFill>
+        <p:spPr>
+          <a:xfrm>
+            <a:off x="609447" y="182880"/>
+            <a:ext cx="10972800" cy="6124353"/>
+          </a:xfrm>
+          <a:prstGeom prst="rect">
+            <a:avLst/>
+          </a:prstGeom>
+        </p:spPr>
+      </p:pic>
+      <p:sp>
+        <p:nvSpPr>
+          <p:cNvPr id="3" name="Rounded Rectangle 2"/>
           <p:cNvSpPr/>
           <p:nvPr/>
         </p:nvSpPr>
         <p:spPr>
           <a:xfrm>
-            <a:off x="10972800" y="256032"/>
-            <a:ext cx="1051560" cy="420624"/>
+            <a:off x="609447" y="6419088"/>
+            <a:ext cx="10972800" cy="384048"/>
           </a:xfrm>
           <a:prstGeom prst="roundRect">
             <a:avLst/>
           </a:prstGeom>
           <a:solidFill>
-            <a:srgbClr val="2F3C7E"/>
+            <a:srgbClr val="1F3A5F"/>
           </a:solidFill>
           <a:ln>
             <a:noFill/>
@@ -6776,105 +7475,27 @@
           </a:fontRef>
         </p:style>
         <p:txBody>
-          <a:bodyPr rtlCol="0" anchor="ctr" wrap="none"/>
+          <a:bodyPr rtlCol="0" anchor="ctr" wrap="square" tIns="25400" bIns="25400"/>
           <a:lstStyle/>
           <a:p>
             <a:pPr algn="ctr"/>
             <a:r>
-              <a:rPr sz="1100" b="1">
+              <a:rPr sz="1500" b="1">
+                <a:solidFill>
+                  <a:srgbClr val="D9A441"/>
+                </a:solidFill>
+                <a:latin typeface="Arial"/>
+              </a:rPr>
+              <a:t>COMPARE   ·   </a:t>
+            </a:r>
+            <a:r>
+              <a:rPr sz="1500" b="1">
                 <a:solidFill>
                   <a:srgbClr val="FFFFFF"/>
                 </a:solidFill>
                 <a:latin typeface="Arial"/>
               </a:rPr>
-              <a:t>PLACEHOLDER</a:t>
-            </a:r>
-          </a:p>
-        </p:txBody>
-      </p:sp>
-      <p:sp>
-        <p:nvSpPr>
-          <p:cNvPr id="8" name="TextBox 7"/>
-          <p:cNvSpPr txBox="1"/>
-          <p:nvPr/>
-        </p:nvSpPr>
-        <p:spPr>
-          <a:xfrm>
-            <a:off x="822960" y="1700000"/>
-            <a:ext cx="10515600" cy="4400000"/>
-          </a:xfrm>
-          <a:prstGeom prst="rect">
-            <a:avLst/>
-          </a:prstGeom>
-          <a:noFill/>
-        </p:spPr>
-        <p:txBody>
-          <a:bodyPr wrap="square">
-            <a:spAutoFit/>
-          </a:bodyPr>
-          <a:lstStyle/>
-          <a:p>
-            <a:pPr>
-              <a:spcAft>
-                <a:spcPts val="1000"/>
-              </a:spcAft>
-            </a:pPr>
-            <a:r>
-              <a:rPr sz="2000" b="1">
-                <a:solidFill>
-                  <a:srgbClr val="1F1F1F"/>
-                </a:solidFill>
-                <a:latin typeface="Arial"/>
-              </a:rPr>
-              <a:t>Intended: ~90-second Unit 2 launch video (Week 5 Monday).</a:t>
-            </a:r>
-          </a:p>
-          <a:p>
-            <a:pPr>
-              <a:spcAft>
-                <a:spcPts val="1000"/>
-              </a:spcAft>
-            </a:pPr>
-            <a:r>
-              <a:rPr sz="2000" b="0">
-                <a:solidFill>
-                  <a:srgbClr val="1F1F1F"/>
-                </a:solidFill>
-                <a:latin typeface="Arial"/>
-              </a:rPr>
-              <a:t>Script ready: production/media/scripts/unit-02/01-where-does-our-energy-come-from-final-script.md</a:t>
-            </a:r>
-          </a:p>
-          <a:p>
-            <a:pPr>
-              <a:spcAft>
-                <a:spcPts val="1000"/>
-              </a:spcAft>
-            </a:pPr>
-            <a:r>
-              <a:rPr sz="2000" b="0">
-                <a:solidFill>
-                  <a:srgbClr val="1F1F1F"/>
-                </a:solidFill>
-                <a:latin typeface="Arial"/>
-              </a:rPr>
-              <a:t>Covers: natural resources → renewable vs nonrenewable → benefits/limitations.</a:t>
-            </a:r>
-          </a:p>
-          <a:p>
-            <a:pPr>
-              <a:spcAft>
-                <a:spcPts val="1000"/>
-              </a:spcAft>
-            </a:pPr>
-            <a:r>
-              <a:rPr sz="2000" b="0">
-                <a:solidFill>
-                  <a:srgbClr val="1F1F1F"/>
-                </a:solidFill>
-                <a:latin typeface="Arial"/>
-              </a:rPr>
-              <a:t>This slide is a drop-in slot — the deck teaches fully without the video.</a:t>
+              <a:t>Which resources renew quickly enough to be called renewable?</a:t>
             </a:r>
           </a:p>
         </p:txBody>
@@ -7219,7 +7840,7 @@
 </file>
 
 <file path=ppt/slides/slide4.xml><?xml version="1.0" encoding="utf-8"?>
-<p:sld xmlns:a="http://schemas.openxmlformats.org/drawingml/2006/main" xmlns:p="http://schemas.openxmlformats.org/presentationml/2006/main" xmlns:r="http://schemas.openxmlformats.org/officeDocument/2006/relationships">
+<p:sld xmlns:a="http://schemas.openxmlformats.org/drawingml/2006/main" xmlns:r="http://schemas.openxmlformats.org/officeDocument/2006/relationships" xmlns:p="http://schemas.openxmlformats.org/presentationml/2006/main">
   <p:cSld>
     <p:spTree>
       <p:nvGrpSpPr>
@@ -7344,13 +7965,13 @@
               </a:spcAft>
             </a:pPr>
             <a:r>
-              <a:rPr sz="3800" b="1" i="0">
+              <a:rPr sz="3200" b="1">
                 <a:solidFill>
                   <a:srgbClr val="FFFFFF"/>
                 </a:solidFill>
                 <a:latin typeface="Arial"/>
               </a:rPr>
-              <a:t>Key Words: renewable / nonrenewable</a:t>
+              <a:t>Where Does Our Energy Come From?</a:t>
             </a:r>
           </a:p>
         </p:txBody>
@@ -7372,7 +7993,7 @@
           <a:noFill/>
         </p:spPr>
         <p:txBody>
-          <a:bodyPr wrap="square" anchor="t">
+          <a:bodyPr wrap="square" anchor="ctr">
             <a:spAutoFit/>
           </a:bodyPr>
           <a:lstStyle/>
@@ -7383,13 +8004,13 @@
               </a:spcAft>
             </a:pPr>
             <a:r>
-              <a:rPr sz="1500" b="0" i="0">
+              <a:rPr sz="1500" b="0">
                 <a:solidFill>
                   <a:srgbClr val="C9D2E8"/>
                 </a:solidFill>
                 <a:latin typeface="Arial"/>
               </a:rPr>
-              <a:t>Page 1 · Key Words</a:t>
+              <a:t>Media placeholder · optional video · pending generation</a:t>
             </a:r>
           </a:p>
         </p:txBody>
@@ -7411,7 +8032,7 @@
           <a:noFill/>
         </p:spPr>
         <p:txBody>
-          <a:bodyPr wrap="square" anchor="t">
+          <a:bodyPr wrap="square" anchor="ctr">
             <a:spAutoFit/>
           </a:bodyPr>
           <a:lstStyle/>
@@ -7422,7 +8043,7 @@
               </a:spcAft>
             </a:pPr>
             <a:r>
-              <a:rPr sz="1500" b="0" i="0">
+              <a:rPr sz="1500" b="0">
                 <a:solidFill>
                   <a:srgbClr val="C9D2E8"/>
                 </a:solidFill>
@@ -7481,7 +8102,7 @@
                 </a:solidFill>
                 <a:latin typeface="Arial"/>
               </a:rPr>
-              <a:t>NOTE</a:t>
+              <a:t>PLACEHOLDER</a:t>
             </a:r>
           </a:p>
         </p:txBody>
@@ -7494,8 +8115,8 @@
         </p:nvSpPr>
         <p:spPr>
           <a:xfrm>
-            <a:off x="822960" y="1645920"/>
-            <a:ext cx="10515600" cy="3017520"/>
+            <a:off x="822960" y="1700000"/>
+            <a:ext cx="10515600" cy="4400000"/>
           </a:xfrm>
           <a:prstGeom prst="rect">
             <a:avLst/>
@@ -7514,13 +8135,13 @@
               </a:spcAft>
             </a:pPr>
             <a:r>
-              <a:rPr sz="3200">
+              <a:rPr sz="2000" b="1">
                 <a:solidFill>
                   <a:srgbClr val="1F1F1F"/>
                 </a:solidFill>
                 <a:latin typeface="Arial"/>
               </a:rPr>
-              <a:t>Renewable = restored as quickly as it is used.</a:t>
+              <a:t>Intended: ~90-second Unit 2 launch video (Week 5 Monday).</a:t>
             </a:r>
           </a:p>
           <a:p>
@@ -7530,13 +8151,45 @@
               </a:spcAft>
             </a:pPr>
             <a:r>
-              <a:rPr sz="3200">
+              <a:rPr sz="2000" b="0">
                 <a:solidFill>
                   <a:srgbClr val="1F1F1F"/>
                 </a:solidFill>
                 <a:latin typeface="Arial"/>
               </a:rPr>
-              <a:t>Nonrenewable = NOT restored that quickly.</a:t>
+              <a:t>Script ready: production/media/scripts/unit-02/01-where-does-our-energy-come-from-final-script.md</a:t>
+            </a:r>
+          </a:p>
+          <a:p>
+            <a:pPr>
+              <a:spcAft>
+                <a:spcPts val="1000"/>
+              </a:spcAft>
+            </a:pPr>
+            <a:r>
+              <a:rPr sz="2000" b="0">
+                <a:solidFill>
+                  <a:srgbClr val="1F1F1F"/>
+                </a:solidFill>
+                <a:latin typeface="Arial"/>
+              </a:rPr>
+              <a:t>Covers: natural resources → renewable vs nonrenewable → benefits/limitations.</a:t>
+            </a:r>
+          </a:p>
+          <a:p>
+            <a:pPr>
+              <a:spcAft>
+                <a:spcPts val="1000"/>
+              </a:spcAft>
+            </a:pPr>
+            <a:r>
+              <a:rPr sz="2000" b="0">
+                <a:solidFill>
+                  <a:srgbClr val="1F1F1F"/>
+                </a:solidFill>
+                <a:latin typeface="Arial"/>
+              </a:rPr>
+              <a:t>This slide is a drop-in slot — the deck teaches fully without the video.</a:t>
             </a:r>
           </a:p>
         </p:txBody>
@@ -7681,7 +8334,7 @@
                 </a:solidFill>
                 <a:latin typeface="Arial"/>
               </a:rPr>
-              <a:t>Key Idea: abundant ≠ renewable</a:t>
+              <a:t>Key Words: renewable / nonrenewable</a:t>
             </a:r>
           </a:p>
         </p:txBody>
@@ -7720,7 +8373,7 @@
                 </a:solidFill>
                 <a:latin typeface="Arial"/>
               </a:rPr>
-              <a:t>Page 1 · Key Idea</a:t>
+              <a:t>Page 1 · Key Words</a:t>
             </a:r>
           </a:p>
         </p:txBody>
@@ -7759,7 +8412,7 @@
                 </a:solidFill>
                 <a:latin typeface="Arial"/>
               </a:rPr>
-              <a:t>5</a:t>
+              <a:t>4</a:t>
             </a:r>
           </a:p>
         </p:txBody>
@@ -7851,7 +8504,7 @@
                 </a:solidFill>
                 <a:latin typeface="Arial"/>
               </a:rPr>
-              <a:t>Abundant does NOT mean renewable.</a:t>
+              <a:t>Renewable = restored as quickly as it is used.</a:t>
             </a:r>
           </a:p>
           <a:p>
@@ -7867,7 +8520,7 @@
                 </a:solidFill>
                 <a:latin typeface="Arial"/>
               </a:rPr>
-              <a:t>Coal is plentiful now but forms over millions of years.</a:t>
+              <a:t>Nonrenewable = NOT restored that quickly.</a:t>
             </a:r>
           </a:p>
         </p:txBody>
@@ -8012,7 +8665,7 @@
                 </a:solidFill>
                 <a:latin typeface="Arial"/>
               </a:rPr>
-              <a:t>Sort It</a:t>
+              <a:t>Key Idea: abundant ≠ renewable</a:t>
             </a:r>
           </a:p>
         </p:txBody>
@@ -8051,7 +8704,7 @@
                 </a:solidFill>
                 <a:latin typeface="Arial"/>
               </a:rPr>
-              <a:t>Page 1 · Sort It</a:t>
+              <a:t>Page 1 · Key Idea</a:t>
             </a:r>
           </a:p>
         </p:txBody>
@@ -8090,7 +8743,7 @@
                 </a:solidFill>
                 <a:latin typeface="Arial"/>
               </a:rPr>
-              <a:t>6</a:t>
+              <a:t>5</a:t>
             </a:r>
           </a:p>
         </p:txBody>
@@ -8182,7 +8835,23 @@
                 </a:solidFill>
                 <a:latin typeface="Arial"/>
               </a:rPr>
-              <a:t>Sort each resource: renewable or nonrenewable?</a:t>
+              <a:t>Abundant does NOT mean renewable.</a:t>
+            </a:r>
+          </a:p>
+          <a:p>
+            <a:pPr>
+              <a:spcAft>
+                <a:spcPts val="1000"/>
+              </a:spcAft>
+            </a:pPr>
+            <a:r>
+              <a:rPr sz="3200">
+                <a:solidFill>
+                  <a:srgbClr val="1F1F1F"/>
+                </a:solidFill>
+                <a:latin typeface="Arial"/>
+              </a:rPr>
+              <a:t>Coal is plentiful now but forms over millions of years.</a:t>
             </a:r>
           </a:p>
         </p:txBody>
@@ -8327,7 +8996,7 @@
                 </a:solidFill>
                 <a:latin typeface="Arial"/>
               </a:rPr>
-              <a:t>Renewable ≠ always available</a:t>
+              <a:t>Sort It</a:t>
             </a:r>
           </a:p>
         </p:txBody>
@@ -8366,7 +9035,7 @@
                 </a:solidFill>
                 <a:latin typeface="Arial"/>
               </a:rPr>
-              <a:t>Page 2 · Availability</a:t>
+              <a:t>Page 1 · Sort It</a:t>
             </a:r>
           </a:p>
         </p:txBody>
@@ -8405,7 +9074,7 @@
                 </a:solidFill>
                 <a:latin typeface="Arial"/>
               </a:rPr>
-              <a:t>7</a:t>
+              <a:t>6</a:t>
             </a:r>
           </a:p>
         </p:txBody>
@@ -8471,46 +9140,7 @@
         </p:nvSpPr>
         <p:spPr>
           <a:xfrm>
-            <a:off x="457200" y="1517904"/>
-            <a:ext cx="10789920" cy="365760"/>
-          </a:xfrm>
-          <a:prstGeom prst="rect">
-            <a:avLst/>
-          </a:prstGeom>
-          <a:noFill/>
-        </p:spPr>
-        <p:txBody>
-          <a:bodyPr wrap="square" anchor="t">
-            <a:spAutoFit/>
-          </a:bodyPr>
-          <a:lstStyle/>
-          <a:p>
-            <a:pPr algn="l">
-              <a:spcAft>
-                <a:spcPts val="400"/>
-              </a:spcAft>
-            </a:pPr>
-            <a:r>
-              <a:rPr sz="1400" b="0" i="1">
-                <a:solidFill>
-                  <a:srgbClr val="C03D3D"/>
-                </a:solidFill>
-                <a:latin typeface="Arial"/>
-              </a:rPr>
-              <a:t>Reveal after students try.</a:t>
-            </a:r>
-          </a:p>
-        </p:txBody>
-      </p:sp>
-      <p:sp>
-        <p:nvSpPr>
-          <p:cNvPr id="9" name="TextBox 8"/>
-          <p:cNvSpPr txBox="1"/>
-          <p:nvPr/>
-        </p:nvSpPr>
-        <p:spPr>
-          <a:xfrm>
-            <a:off x="822960" y="2011680"/>
+            <a:off x="822960" y="1645920"/>
             <a:ext cx="10515600" cy="3017520"/>
           </a:xfrm>
           <a:prstGeom prst="rect">
@@ -8536,23 +9166,7 @@
                 </a:solidFill>
                 <a:latin typeface="Arial"/>
               </a:rPr>
-              <a:t>Renewable depends on location and conditions.</a:t>
-            </a:r>
-          </a:p>
-          <a:p>
-            <a:pPr>
-              <a:spcAft>
-                <a:spcPts val="1000"/>
-              </a:spcAft>
-            </a:pPr>
-            <a:r>
-              <a:rPr sz="3200">
-                <a:solidFill>
-                  <a:srgbClr val="1F1F1F"/>
-                </a:solidFill>
-                <a:latin typeface="Arial"/>
-              </a:rPr>
-              <a:t>Some places get little sun or steady wind.</a:t>
+              <a:t>Sort each resource: renewable or nonrenewable?</a:t>
             </a:r>
           </a:p>
         </p:txBody>
@@ -8697,7 +9311,7 @@
                 </a:solidFill>
                 <a:latin typeface="Arial"/>
               </a:rPr>
-              <a:t>Benefits and limits of renewables</a:t>
+              <a:t>Renewable ≠ always available</a:t>
             </a:r>
           </a:p>
         </p:txBody>
@@ -8736,7 +9350,7 @@
                 </a:solidFill>
                 <a:latin typeface="Arial"/>
               </a:rPr>
-              <a:t>Page 2 · Benefits and Limits</a:t>
+              <a:t>Page 2 · Availability</a:t>
             </a:r>
           </a:p>
         </p:txBody>
@@ -8775,7 +9389,7 @@
                 </a:solidFill>
                 <a:latin typeface="Arial"/>
               </a:rPr>
-              <a:t>8</a:t>
+              <a:t>7</a:t>
             </a:r>
           </a:p>
         </p:txBody>
@@ -8841,7 +9455,46 @@
         </p:nvSpPr>
         <p:spPr>
           <a:xfrm>
-            <a:off x="822960" y="1645920"/>
+            <a:off x="457200" y="1517904"/>
+            <a:ext cx="10789920" cy="365760"/>
+          </a:xfrm>
+          <a:prstGeom prst="rect">
+            <a:avLst/>
+          </a:prstGeom>
+          <a:noFill/>
+        </p:spPr>
+        <p:txBody>
+          <a:bodyPr wrap="square" anchor="t">
+            <a:spAutoFit/>
+          </a:bodyPr>
+          <a:lstStyle/>
+          <a:p>
+            <a:pPr algn="l">
+              <a:spcAft>
+                <a:spcPts val="400"/>
+              </a:spcAft>
+            </a:pPr>
+            <a:r>
+              <a:rPr sz="1400" b="0" i="1">
+                <a:solidFill>
+                  <a:srgbClr val="C03D3D"/>
+                </a:solidFill>
+                <a:latin typeface="Arial"/>
+              </a:rPr>
+              <a:t>Reveal after students try.</a:t>
+            </a:r>
+          </a:p>
+        </p:txBody>
+      </p:sp>
+      <p:sp>
+        <p:nvSpPr>
+          <p:cNvPr id="9" name="TextBox 8"/>
+          <p:cNvSpPr txBox="1"/>
+          <p:nvPr/>
+        </p:nvSpPr>
+        <p:spPr>
+          <a:xfrm>
+            <a:off x="822960" y="2011680"/>
             <a:ext cx="10515600" cy="3017520"/>
           </a:xfrm>
           <a:prstGeom prst="rect">
@@ -8867,7 +9520,23 @@
                 </a:solidFill>
                 <a:latin typeface="Arial"/>
               </a:rPr>
-              <a:t>Renewables still have costs — turbines, panel cost, dams flood land.</a:t>
+              <a:t>Renewable depends on location and conditions.</a:t>
+            </a:r>
+          </a:p>
+          <a:p>
+            <a:pPr>
+              <a:spcAft>
+                <a:spcPts val="1000"/>
+              </a:spcAft>
+            </a:pPr>
+            <a:r>
+              <a:rPr sz="3200">
+                <a:solidFill>
+                  <a:srgbClr val="1F1F1F"/>
+                </a:solidFill>
+                <a:latin typeface="Arial"/>
+              </a:rPr>
+              <a:t>Some places get little sun or steady wind.</a:t>
             </a:r>
           </a:p>
         </p:txBody>
@@ -9012,7 +9681,7 @@
                 </a:solidFill>
                 <a:latin typeface="Arial"/>
               </a:rPr>
-              <a:t>Model It: restored quickly</a:t>
+              <a:t>Benefits and limits of renewables</a:t>
             </a:r>
           </a:p>
         </p:txBody>
@@ -9051,7 +9720,7 @@
                 </a:solidFill>
                 <a:latin typeface="Arial"/>
               </a:rPr>
-              <a:t>Page 2 · Model It</a:t>
+              <a:t>Page 2 · Benefits and Limits</a:t>
             </a:r>
           </a:p>
         </p:txBody>
@@ -9090,7 +9759,7 @@
                 </a:solidFill>
                 <a:latin typeface="Arial"/>
               </a:rPr>
-              <a:t>9</a:t>
+              <a:t>8</a:t>
             </a:r>
           </a:p>
         </p:txBody>
@@ -9156,46 +9825,7 @@
         </p:nvSpPr>
         <p:spPr>
           <a:xfrm>
-            <a:off x="457200" y="1517904"/>
-            <a:ext cx="10789920" cy="365760"/>
-          </a:xfrm>
-          <a:prstGeom prst="rect">
-            <a:avLst/>
-          </a:prstGeom>
-          <a:noFill/>
-        </p:spPr>
-        <p:txBody>
-          <a:bodyPr wrap="square" anchor="t">
-            <a:spAutoFit/>
-          </a:bodyPr>
-          <a:lstStyle/>
-          <a:p>
-            <a:pPr algn="l">
-              <a:spcAft>
-                <a:spcPts val="400"/>
-              </a:spcAft>
-            </a:pPr>
-            <a:r>
-              <a:rPr sz="1400" b="0" i="1">
-                <a:solidFill>
-                  <a:srgbClr val="C03D3D"/>
-                </a:solidFill>
-                <a:latin typeface="Arial"/>
-              </a:rPr>
-              <a:t>Reveal after students try.</a:t>
-            </a:r>
-          </a:p>
-        </p:txBody>
-      </p:sp>
-      <p:sp>
-        <p:nvSpPr>
-          <p:cNvPr id="9" name="TextBox 8"/>
-          <p:cNvSpPr txBox="1"/>
-          <p:nvPr/>
-        </p:nvSpPr>
-        <p:spPr>
-          <a:xfrm>
-            <a:off x="822960" y="2011680"/>
+            <a:off x="822960" y="1645920"/>
             <a:ext cx="10515600" cy="3017520"/>
           </a:xfrm>
           <a:prstGeom prst="rect">
@@ -9221,96 +9851,7 @@
                 </a:solidFill>
                 <a:latin typeface="Arial"/>
               </a:rPr>
-              <a:t>Copy the chain.</a:t>
-            </a:r>
-          </a:p>
-        </p:txBody>
-      </p:sp>
-      <p:sp>
-        <p:nvSpPr>
-          <p:cNvPr id="10" name="Rounded Rectangle 9"/>
-          <p:cNvSpPr/>
-          <p:nvPr/>
-        </p:nvSpPr>
-        <p:spPr>
-          <a:xfrm>
-            <a:off x="822960" y="5120640"/>
-            <a:ext cx="10515600" cy="868680"/>
-          </a:xfrm>
-          <a:prstGeom prst="roundRect">
-            <a:avLst/>
-          </a:prstGeom>
-          <a:solidFill>
-            <a:srgbClr val="2F3C7E"/>
-          </a:solidFill>
-          <a:ln>
-            <a:noFill/>
-          </a:ln>
-          <a:effectLst/>
-        </p:spPr>
-        <p:style>
-          <a:lnRef idx="1">
-            <a:schemeClr val="accent1"/>
-          </a:lnRef>
-          <a:fillRef idx="3">
-            <a:schemeClr val="accent1"/>
-          </a:fillRef>
-          <a:effectRef idx="2">
-            <a:schemeClr val="accent1"/>
-          </a:effectRef>
-          <a:fontRef idx="minor">
-            <a:schemeClr val="lt1"/>
-          </a:fontRef>
-        </p:style>
-        <p:txBody>
-          <a:bodyPr rtlCol="0" anchor="ctr" wrap="square" lIns="127000" rIns="127000"/>
-          <a:lstStyle/>
-          <a:p>
-            <a:pPr algn="ctr"/>
-            <a:r>
-              <a:rPr sz="2600" b="1">
-                <a:solidFill>
-                  <a:srgbClr val="E8C54A"/>
-                </a:solidFill>
-                <a:latin typeface="Arial"/>
-              </a:rPr>
-              <a:t>USED SLOWLY</a:t>
-            </a:r>
-            <a:r>
-              <a:rPr sz="2600" b="1">
-                <a:solidFill>
-                  <a:srgbClr val="C03D3D"/>
-                </a:solidFill>
-                <a:latin typeface="Arial"/>
-              </a:rPr>
-              <a:t> → </a:t>
-            </a:r>
-            <a:r>
-              <a:rPr sz="2600" b="1">
-                <a:solidFill>
-                  <a:srgbClr val="FFFFFF"/>
-                </a:solidFill>
-                <a:latin typeface="Arial"/>
-              </a:rPr>
-              <a:t>RESTORED QUICKLY</a:t>
-            </a:r>
-            <a:r>
-              <a:rPr sz="2600" b="1">
-                <a:solidFill>
-                  <a:srgbClr val="C03D3D"/>
-                </a:solidFill>
-                <a:latin typeface="Arial"/>
-              </a:rPr>
-              <a:t> → </a:t>
-            </a:r>
-            <a:r>
-              <a:rPr sz="2600" b="1">
-                <a:solidFill>
-                  <a:srgbClr val="FFFFFF"/>
-                </a:solidFill>
-                <a:latin typeface="Arial"/>
-              </a:rPr>
-              <a:t>RENEWABLE</a:t>
+              <a:t>Renewables still have costs — turbines, panel cost, dams flood land.</a:t>
             </a:r>
           </a:p>
         </p:txBody>
@@ -9641,4 +10182,324 @@
   </a:objectDefaults>
   <a:extraClrSchemeLst/>
 </a:theme>
+</file>
+
+<file path=ppt/theme/theme2.xml><?xml version="1.0" encoding="utf-8"?>
+<a:theme xmlns:a="http://schemas.openxmlformats.org/drawingml/2006/main" name="Office Theme">
+  <a:themeElements>
+    <a:clrScheme name="Office">
+      <a:dk1>
+        <a:sysClr val="windowText" lastClr="000000"/>
+      </a:dk1>
+      <a:lt1>
+        <a:sysClr val="window" lastClr="FFFFFF"/>
+      </a:lt1>
+      <a:dk2>
+        <a:srgbClr val="1F497D"/>
+      </a:dk2>
+      <a:lt2>
+        <a:srgbClr val="EEECE1"/>
+      </a:lt2>
+      <a:accent1>
+        <a:srgbClr val="4F81BD"/>
+      </a:accent1>
+      <a:accent2>
+        <a:srgbClr val="C0504D"/>
+      </a:accent2>
+      <a:accent3>
+        <a:srgbClr val="9BBB59"/>
+      </a:accent3>
+      <a:accent4>
+        <a:srgbClr val="8064A2"/>
+      </a:accent4>
+      <a:accent5>
+        <a:srgbClr val="4BACC6"/>
+      </a:accent5>
+      <a:accent6>
+        <a:srgbClr val="F79646"/>
+      </a:accent6>
+      <a:hlink>
+        <a:srgbClr val="0000FF"/>
+      </a:hlink>
+      <a:folHlink>
+        <a:srgbClr val="800080"/>
+      </a:folHlink>
+    </a:clrScheme>
+    <a:fontScheme name="Office">
+      <a:majorFont>
+        <a:latin typeface="Calibri"/>
+        <a:ea typeface=""/>
+        <a:cs typeface=""/>
+        <a:font script="Jpan" typeface="ＭＳ Ｐゴシック"/>
+        <a:font script="Hang" typeface="맑은 고딕"/>
+        <a:font script="Hans" typeface="宋体"/>
+        <a:font script="Hant" typeface="新細明體"/>
+        <a:font script="Arab" typeface="Times New Roman"/>
+        <a:font script="Hebr" typeface="Times New Roman"/>
+        <a:font script="Thai" typeface="Angsana New"/>
+        <a:font script="Ethi" typeface="Nyala"/>
+        <a:font script="Beng" typeface="Vrinda"/>
+        <a:font script="Gujr" typeface="Shruti"/>
+        <a:font script="Khmr" typeface="MoolBoran"/>
+        <a:font script="Knda" typeface="Tunga"/>
+        <a:font script="Guru" typeface="Raavi"/>
+        <a:font script="Cans" typeface="Euphemia"/>
+        <a:font script="Cher" typeface="Plantagenet Cherokee"/>
+        <a:font script="Yiii" typeface="Microsoft Yi Baiti"/>
+        <a:font script="Tibt" typeface="Microsoft Himalaya"/>
+        <a:font script="Thaa" typeface="MV Boli"/>
+        <a:font script="Deva" typeface="Mangal"/>
+        <a:font script="Telu" typeface="Gautami"/>
+        <a:font script="Taml" typeface="Latha"/>
+        <a:font script="Syrc" typeface="Estrangelo Edessa"/>
+        <a:font script="Orya" typeface="Kalinga"/>
+        <a:font script="Mlym" typeface="Kartika"/>
+        <a:font script="Laoo" typeface="DokChampa"/>
+        <a:font script="Sinh" typeface="Iskoola Pota"/>
+        <a:font script="Mong" typeface="Mongolian Baiti"/>
+        <a:font script="Viet" typeface="Times New Roman"/>
+        <a:font script="Uigh" typeface="Microsoft Uighur"/>
+        <a:font script="Geor" typeface="Sylfaen"/>
+      </a:majorFont>
+      <a:minorFont>
+        <a:latin typeface="Calibri"/>
+        <a:ea typeface=""/>
+        <a:cs typeface=""/>
+        <a:font script="Jpan" typeface="ＭＳ Ｐゴシック"/>
+        <a:font script="Hang" typeface="맑은 고딕"/>
+        <a:font script="Hans" typeface="宋体"/>
+        <a:font script="Hant" typeface="新細明體"/>
+        <a:font script="Arab" typeface="Arial"/>
+        <a:font script="Hebr" typeface="Arial"/>
+        <a:font script="Thai" typeface="Cordia New"/>
+        <a:font script="Ethi" typeface="Nyala"/>
+        <a:font script="Beng" typeface="Vrinda"/>
+        <a:font script="Gujr" typeface="Shruti"/>
+        <a:font script="Khmr" typeface="DaunPenh"/>
+        <a:font script="Knda" typeface="Tunga"/>
+        <a:font script="Guru" typeface="Raavi"/>
+        <a:font script="Cans" typeface="Euphemia"/>
+        <a:font script="Cher" typeface="Plantagenet Cherokee"/>
+        <a:font script="Yiii" typeface="Microsoft Yi Baiti"/>
+        <a:font script="Tibt" typeface="Microsoft Himalaya"/>
+        <a:font script="Thaa" typeface="MV Boli"/>
+        <a:font script="Deva" typeface="Mangal"/>
+        <a:font script="Telu" typeface="Gautami"/>
+        <a:font script="Taml" typeface="Latha"/>
+        <a:font script="Syrc" typeface="Estrangelo Edessa"/>
+        <a:font script="Orya" typeface="Kalinga"/>
+        <a:font script="Mlym" typeface="Kartika"/>
+        <a:font script="Laoo" typeface="DokChampa"/>
+        <a:font script="Sinh" typeface="Iskoola Pota"/>
+        <a:font script="Mong" typeface="Mongolian Baiti"/>
+        <a:font script="Viet" typeface="Arial"/>
+        <a:font script="Uigh" typeface="Microsoft Uighur"/>
+        <a:font script="Geor" typeface="Sylfaen"/>
+      </a:minorFont>
+    </a:fontScheme>
+    <a:fmtScheme name="Office">
+      <a:fillStyleLst>
+        <a:solidFill>
+          <a:schemeClr val="phClr"/>
+        </a:solidFill>
+        <a:gradFill rotWithShape="1">
+          <a:gsLst>
+            <a:gs pos="0">
+              <a:schemeClr val="phClr">
+                <a:tint val="50000"/>
+                <a:satMod val="300000"/>
+              </a:schemeClr>
+            </a:gs>
+            <a:gs pos="35000">
+              <a:schemeClr val="phClr">
+                <a:tint val="37000"/>
+                <a:satMod val="300000"/>
+              </a:schemeClr>
+            </a:gs>
+            <a:gs pos="100000">
+              <a:schemeClr val="phClr">
+                <a:tint val="15000"/>
+                <a:satMod val="350000"/>
+              </a:schemeClr>
+            </a:gs>
+          </a:gsLst>
+          <a:lin ang="16200000" scaled="1"/>
+        </a:gradFill>
+        <a:gradFill rotWithShape="1">
+          <a:gsLst>
+            <a:gs pos="0">
+              <a:schemeClr val="phClr">
+                <a:tint val="100000"/>
+                <a:shade val="100000"/>
+                <a:satMod val="130000"/>
+              </a:schemeClr>
+            </a:gs>
+            <a:gs pos="100000">
+              <a:schemeClr val="phClr">
+                <a:tint val="50000"/>
+                <a:shade val="100000"/>
+                <a:satMod val="350000"/>
+              </a:schemeClr>
+            </a:gs>
+          </a:gsLst>
+          <a:lin ang="16200000" scaled="0"/>
+        </a:gradFill>
+      </a:fillStyleLst>
+      <a:lnStyleLst>
+        <a:ln w="9525" cap="flat" cmpd="sng" algn="ctr">
+          <a:solidFill>
+            <a:schemeClr val="phClr">
+              <a:shade val="95000"/>
+              <a:satMod val="105000"/>
+            </a:schemeClr>
+          </a:solidFill>
+          <a:prstDash val="solid"/>
+        </a:ln>
+        <a:ln w="25400" cap="flat" cmpd="sng" algn="ctr">
+          <a:solidFill>
+            <a:schemeClr val="phClr"/>
+          </a:solidFill>
+          <a:prstDash val="solid"/>
+        </a:ln>
+        <a:ln w="38100" cap="flat" cmpd="sng" algn="ctr">
+          <a:solidFill>
+            <a:schemeClr val="phClr"/>
+          </a:solidFill>
+          <a:prstDash val="solid"/>
+        </a:ln>
+      </a:lnStyleLst>
+      <a:effectStyleLst>
+        <a:effectStyle>
+          <a:effectLst>
+            <a:outerShdw blurRad="40000" dist="20000" dir="5400000" rotWithShape="0">
+              <a:srgbClr val="000000">
+                <a:alpha val="38000"/>
+              </a:srgbClr>
+            </a:outerShdw>
+          </a:effectLst>
+        </a:effectStyle>
+        <a:effectStyle>
+          <a:effectLst>
+            <a:outerShdw blurRad="40000" dist="23000" dir="5400000" rotWithShape="0">
+              <a:srgbClr val="000000">
+                <a:alpha val="35000"/>
+              </a:srgbClr>
+            </a:outerShdw>
+          </a:effectLst>
+        </a:effectStyle>
+        <a:effectStyle>
+          <a:effectLst>
+            <a:outerShdw blurRad="40000" dist="23000" dir="5400000" rotWithShape="0">
+              <a:srgbClr val="000000">
+                <a:alpha val="35000"/>
+              </a:srgbClr>
+            </a:outerShdw>
+          </a:effectLst>
+          <a:scene3d>
+            <a:camera prst="orthographicFront">
+              <a:rot lat="0" lon="0" rev="0"/>
+            </a:camera>
+            <a:lightRig rig="threePt" dir="t">
+              <a:rot lat="0" lon="0" rev="1200000"/>
+            </a:lightRig>
+          </a:scene3d>
+          <a:sp3d>
+            <a:bevelT w="63500" h="25400"/>
+          </a:sp3d>
+        </a:effectStyle>
+      </a:effectStyleLst>
+      <a:bgFillStyleLst>
+        <a:solidFill>
+          <a:schemeClr val="phClr"/>
+        </a:solidFill>
+        <a:gradFill rotWithShape="1">
+          <a:gsLst>
+            <a:gs pos="0">
+              <a:schemeClr val="phClr">
+                <a:tint val="40000"/>
+                <a:satMod val="350000"/>
+              </a:schemeClr>
+            </a:gs>
+            <a:gs pos="40000">
+              <a:schemeClr val="phClr">
+                <a:tint val="45000"/>
+                <a:shade val="99000"/>
+                <a:satMod val="350000"/>
+              </a:schemeClr>
+            </a:gs>
+            <a:gs pos="100000">
+              <a:schemeClr val="phClr">
+                <a:shade val="20000"/>
+                <a:satMod val="255000"/>
+              </a:schemeClr>
+            </a:gs>
+          </a:gsLst>
+          <a:path path="circle">
+            <a:fillToRect l="50000" t="-80000" r="50000" b="180000"/>
+          </a:path>
+        </a:gradFill>
+        <a:gradFill rotWithShape="1">
+          <a:gsLst>
+            <a:gs pos="0">
+              <a:schemeClr val="phClr">
+                <a:tint val="80000"/>
+                <a:satMod val="300000"/>
+              </a:schemeClr>
+            </a:gs>
+            <a:gs pos="100000">
+              <a:schemeClr val="phClr">
+                <a:shade val="30000"/>
+                <a:satMod val="200000"/>
+              </a:schemeClr>
+            </a:gs>
+          </a:gsLst>
+          <a:path path="circle">
+            <a:fillToRect l="50000" t="50000" r="50000" b="50000"/>
+          </a:path>
+        </a:gradFill>
+      </a:bgFillStyleLst>
+    </a:fmtScheme>
+  </a:themeElements>
+  <a:objectDefaults>
+    <a:spDef>
+      <a:spPr/>
+      <a:bodyPr/>
+      <a:lstStyle/>
+      <a:style>
+        <a:lnRef idx="1">
+          <a:schemeClr val="accent1"/>
+        </a:lnRef>
+        <a:fillRef idx="3">
+          <a:schemeClr val="accent1"/>
+        </a:fillRef>
+        <a:effectRef idx="2">
+          <a:schemeClr val="accent1"/>
+        </a:effectRef>
+        <a:fontRef idx="minor">
+          <a:schemeClr val="lt1"/>
+        </a:fontRef>
+      </a:style>
+    </a:spDef>
+    <a:lnDef>
+      <a:spPr/>
+      <a:bodyPr/>
+      <a:lstStyle/>
+      <a:style>
+        <a:lnRef idx="2">
+          <a:schemeClr val="accent1"/>
+        </a:lnRef>
+        <a:fillRef idx="0">
+          <a:schemeClr val="accent1"/>
+        </a:fillRef>
+        <a:effectRef idx="1">
+          <a:schemeClr val="accent1"/>
+        </a:effectRef>
+        <a:fontRef idx="minor">
+          <a:schemeClr val="tx1"/>
+        </a:fontRef>
+      </a:style>
+    </a:lnDef>
+  </a:objectDefaults>
+  <a:extraClrSchemeLst/>
+</a:theme>
 </file>
--- a/production/slides/01-u2-ch1-renewable-nonrenewable-slides.pptx
+++ b/production/slides/01-u2-ch1-renewable-nonrenewable-slides.pptx
@@ -540,6 +540,91 @@
           <a:p>
             <a:r>
               <a:t>Approved rebuilt visual — production/infographics/unit2-renewable-nonrenewable-resources.png. Locked Grade 4 vocabulary only.</a:t>
+            </a:r>
+          </a:p>
+        </p:txBody>
+      </p:sp>
+      <p:sp>
+        <p:nvSpPr>
+          <p:cNvPr id="4" name="Slide Number Placeholder 3"/>
+          <p:cNvSpPr>
+            <a:spLocks noGrp="1"/>
+          </p:cNvSpPr>
+          <p:nvPr>
+            <p:ph type="sldNum" idx="5" sz="quarter"/>
+          </p:nvPr>
+        </p:nvSpPr>
+        <p:spPr/>
+      </p:sp>
+    </p:spTree>
+  </p:cSld>
+  <p:clrMapOvr>
+    <a:masterClrMapping/>
+  </p:clrMapOvr>
+</p:notes>
+</file>
+
+<file path=ppt/notesSlides/notesSlide2.xml><?xml version="1.0" encoding="utf-8"?>
+<p:notes xmlns:a="http://schemas.openxmlformats.org/drawingml/2006/main" xmlns:p="http://schemas.openxmlformats.org/presentationml/2006/main" xmlns:r="http://schemas.openxmlformats.org/officeDocument/2006/relationships">
+  <p:cSld>
+    <p:spTree>
+      <p:nvGrpSpPr>
+        <p:cNvPr id="1" name=""/>
+        <p:cNvGrpSpPr/>
+        <p:nvPr/>
+      </p:nvGrpSpPr>
+      <p:grpSpPr>
+        <a:xfrm>
+          <a:off x="0" y="0"/>
+          <a:ext cx="0" cy="0"/>
+          <a:chOff x="0" y="0"/>
+          <a:chExt cx="0" cy="0"/>
+        </a:xfrm>
+      </p:grpSpPr>
+      <p:sp>
+        <p:nvSpPr>
+          <p:cNvPr id="2" name="Slide Image Placeholder 1"/>
+          <p:cNvSpPr>
+            <a:spLocks noGrp="1"/>
+          </p:cNvSpPr>
+          <p:nvPr>
+            <p:ph type="sldImg" idx="2"/>
+          </p:nvPr>
+        </p:nvSpPr>
+        <p:spPr/>
+      </p:sp>
+      <p:sp>
+        <p:nvSpPr>
+          <p:cNvPr id="3" name="Notes Placeholder 2"/>
+          <p:cNvSpPr>
+            <a:spLocks noGrp="1"/>
+          </p:cNvSpPr>
+          <p:nvPr>
+            <p:ph type="body" idx="3" sz="quarter"/>
+          </p:nvPr>
+        </p:nvSpPr>
+        <p:spPr/>
+        <p:txBody>
+          <a:bodyPr/>
+          <a:lstStyle/>
+          <a:p>
+            <a:r>
+              <a:t>Intended: ~90-second Unit 2 launch video (Week 5 Monday).</a:t>
+            </a:r>
+          </a:p>
+          <a:p>
+            <a:r>
+              <a:t>Script ready: production/media/scripts/unit-02/01-where-does-our-energy-come-from-final-script.md</a:t>
+            </a:r>
+          </a:p>
+          <a:p>
+            <a:r>
+              <a:t>Covers: natural resources → renewable vs nonrenewable → benefits/limitations.</a:t>
+            </a:r>
+          </a:p>
+          <a:p>
+            <a:r>
+              <a:t>This slide is a drop-in slot — the deck teaches fully without the video.</a:t>
             </a:r>
           </a:p>
         </p:txBody>
@@ -8010,7 +8095,7 @@
                 </a:solidFill>
                 <a:latin typeface="Arial"/>
               </a:rPr>
-              <a:t>Media placeholder · optional video · pending generation</a:t>
+              <a:t>Optional video · Week 5 Monday</a:t>
             </a:r>
           </a:p>
         </p:txBody>
@@ -8091,7 +8176,7 @@
           </a:fontRef>
         </p:style>
         <p:txBody>
-          <a:bodyPr rtlCol="0" anchor="ctr" wrap="none"/>
+          <a:bodyPr rtlCol="0" anchor="ctr" wrap="square"/>
           <a:lstStyle/>
           <a:p>
             <a:pPr algn="ctr"/>
@@ -8102,7 +8187,7 @@
                 </a:solidFill>
                 <a:latin typeface="Arial"/>
               </a:rPr>
-              <a:t>PLACEHOLDER</a:t>
+              <a:t>WATCH</a:t>
             </a:r>
           </a:p>
         </p:txBody>
@@ -8115,8 +8200,8 @@
         </p:nvSpPr>
         <p:spPr>
           <a:xfrm>
-            <a:off x="822960" y="1700000"/>
-            <a:ext cx="10515600" cy="4400000"/>
+            <a:off x="457200" y="6500000"/>
+            <a:ext cx="11277295" cy="300000"/>
           </a:xfrm>
           <a:prstGeom prst="rect">
             <a:avLst/>
@@ -8129,68 +8214,148 @@
           </a:bodyPr>
           <a:lstStyle/>
           <a:p>
-            <a:pPr>
-              <a:spcAft>
-                <a:spcPts val="1000"/>
-              </a:spcAft>
-            </a:pPr>
-            <a:r>
-              <a:rPr sz="2000" b="1">
-                <a:solidFill>
-                  <a:srgbClr val="1F1F1F"/>
-                </a:solidFill>
-                <a:latin typeface="Arial"/>
-              </a:rPr>
-              <a:t>Intended: ~90-second Unit 2 launch video (Week 5 Monday).</a:t>
-            </a:r>
-          </a:p>
-          <a:p>
-            <a:pPr>
-              <a:spcAft>
-                <a:spcPts val="1000"/>
-              </a:spcAft>
-            </a:pPr>
-            <a:r>
-              <a:rPr sz="2000" b="0">
-                <a:solidFill>
-                  <a:srgbClr val="1F1F1F"/>
-                </a:solidFill>
-                <a:latin typeface="Arial"/>
-              </a:rPr>
-              <a:t>Script ready: production/media/scripts/unit-02/01-where-does-our-energy-come-from-final-script.md</a:t>
-            </a:r>
-          </a:p>
-          <a:p>
-            <a:pPr>
-              <a:spcAft>
-                <a:spcPts val="1000"/>
-              </a:spcAft>
-            </a:pPr>
-            <a:r>
-              <a:rPr sz="2000" b="0">
-                <a:solidFill>
-                  <a:srgbClr val="1F1F1F"/>
-                </a:solidFill>
-                <a:latin typeface="Arial"/>
-              </a:rPr>
-              <a:t>Covers: natural resources → renewable vs nonrenewable → benefits/limitations.</a:t>
-            </a:r>
-          </a:p>
-          <a:p>
-            <a:pPr>
-              <a:spcAft>
-                <a:spcPts val="1000"/>
-              </a:spcAft>
-            </a:pPr>
-            <a:r>
-              <a:rPr sz="2000" b="0">
-                <a:solidFill>
-                  <a:srgbClr val="1F1F1F"/>
-                </a:solidFill>
-                <a:latin typeface="Arial"/>
-              </a:rPr>
-              <a:t>This slide is a drop-in slot — the deck teaches fully without the video.</a:t>
-            </a:r>
+            <a:pPr algn="ctr"/>
+            <a:r>
+              <a:rPr sz="1800" b="1">
+                <a:solidFill>
+                  <a:srgbClr val="2F3C7E"/>
+                </a:solidFill>
+                <a:latin typeface="Arial"/>
+              </a:rPr>
+              <a:t>THINK: Where do the resources we use every day come from?</a:t>
+            </a:r>
+          </a:p>
+        </p:txBody>
+      </p:sp>
+      <p:sp>
+        <p:nvSpPr>
+          <p:cNvPr id="9" name="Rounded Rectangle 8"/>
+          <p:cNvSpPr/>
+          <p:nvPr/>
+        </p:nvSpPr>
+        <p:spPr>
+          <a:xfrm>
+            <a:off x="1895847" y="1720000"/>
+            <a:ext cx="8400000" cy="4725000"/>
+          </a:xfrm>
+          <a:prstGeom prst="roundRect">
+            <a:avLst/>
+          </a:prstGeom>
+          <a:solidFill>
+            <a:srgbClr val="E8ECF6"/>
+          </a:solidFill>
+          <a:ln>
+            <a:noFill/>
+          </a:ln>
+          <a:effectLst/>
+        </p:spPr>
+        <p:style>
+          <a:lnRef idx="1">
+            <a:schemeClr val="accent1"/>
+          </a:lnRef>
+          <a:fillRef idx="3">
+            <a:schemeClr val="accent1"/>
+          </a:fillRef>
+          <a:effectRef idx="2">
+            <a:schemeClr val="accent1"/>
+          </a:effectRef>
+          <a:fontRef idx="minor">
+            <a:schemeClr val="lt1"/>
+          </a:fontRef>
+        </p:style>
+        <p:txBody>
+          <a:bodyPr rtlCol="0" anchor="ctr"/>
+          <a:lstStyle/>
+          <a:p>
+            <a:pPr algn="ctr"/>
+          </a:p>
+        </p:txBody>
+      </p:sp>
+      <p:sp>
+        <p:nvSpPr>
+          <p:cNvPr id="10" name="Oval 9"/>
+          <p:cNvSpPr/>
+          <p:nvPr/>
+        </p:nvSpPr>
+        <p:spPr>
+          <a:xfrm>
+            <a:off x="5410047" y="3396700"/>
+            <a:ext cx="1371600" cy="1371600"/>
+          </a:xfrm>
+          <a:prstGeom prst="ellipse">
+            <a:avLst/>
+          </a:prstGeom>
+          <a:solidFill>
+            <a:srgbClr val="2F3C7E"/>
+          </a:solidFill>
+          <a:ln>
+            <a:noFill/>
+          </a:ln>
+          <a:effectLst/>
+        </p:spPr>
+        <p:style>
+          <a:lnRef idx="1">
+            <a:schemeClr val="accent1"/>
+          </a:lnRef>
+          <a:fillRef idx="3">
+            <a:schemeClr val="accent1"/>
+          </a:fillRef>
+          <a:effectRef idx="2">
+            <a:schemeClr val="accent1"/>
+          </a:effectRef>
+          <a:fontRef idx="minor">
+            <a:schemeClr val="lt1"/>
+          </a:fontRef>
+        </p:style>
+        <p:txBody>
+          <a:bodyPr rtlCol="0" anchor="ctr"/>
+          <a:lstStyle/>
+          <a:p>
+            <a:pPr algn="ctr"/>
+          </a:p>
+        </p:txBody>
+      </p:sp>
+      <p:sp>
+        <p:nvSpPr>
+          <p:cNvPr id="11" name="Isosceles Triangle 10"/>
+          <p:cNvSpPr/>
+          <p:nvPr/>
+        </p:nvSpPr>
+        <p:spPr>
+          <a:xfrm rot="5400000">
+            <a:off x="5821527" y="3808180"/>
+            <a:ext cx="548640" cy="548640"/>
+          </a:xfrm>
+          <a:prstGeom prst="triangle">
+            <a:avLst/>
+          </a:prstGeom>
+          <a:solidFill>
+            <a:srgbClr val="FFFFFF"/>
+          </a:solidFill>
+          <a:ln>
+            <a:noFill/>
+          </a:ln>
+          <a:effectLst/>
+        </p:spPr>
+        <p:style>
+          <a:lnRef idx="1">
+            <a:schemeClr val="accent1"/>
+          </a:lnRef>
+          <a:fillRef idx="3">
+            <a:schemeClr val="accent1"/>
+          </a:fillRef>
+          <a:effectRef idx="2">
+            <a:schemeClr val="accent1"/>
+          </a:effectRef>
+          <a:fontRef idx="minor">
+            <a:schemeClr val="lt1"/>
+          </a:fontRef>
+        </p:style>
+        <p:txBody>
+          <a:bodyPr rtlCol="0" anchor="ctr"/>
+          <a:lstStyle/>
+          <a:p>
+            <a:pPr algn="ctr"/>
           </a:p>
         </p:txBody>
       </p:sp>
